--- a/index/designs/y7-l11/l7-partner-interview/l7-partner-interview.pptx
+++ b/index/designs/y7-l11/l7-partner-interview/l7-partner-interview.pptx
@@ -2750,9 +2750,6 @@
               </a:rPr>
               <a:t>他/她 </a:t>
             </a:r>
-            <a:pPr algn="l" indent="0" marL="0">
-              <a:buNone/>
-            </a:pPr>
             <a:r>
               <a:rPr lang="en-US" sz="1100" b="1" dirty="0">
                 <a:solidFill>
@@ -2764,9 +2761,6 @@
               </a:rPr>
               <a:t>+ [time-of-day]</a:t>
             </a:r>
-            <a:pPr algn="l" indent="0" marL="0">
-              <a:buNone/>
-            </a:pPr>
             <a:r>
               <a:rPr lang="en-US" sz="1500" dirty="0">
                 <a:solidFill>
@@ -2778,9 +2772,6 @@
               </a:rPr>
               <a:t> </a:t>
             </a:r>
-            <a:pPr algn="l" indent="0" marL="0">
-              <a:buNone/>
-            </a:pPr>
             <a:r>
               <a:rPr lang="en-US" sz="1100" b="1" dirty="0">
                 <a:solidFill>
@@ -2792,9 +2783,6 @@
               </a:rPr>
               <a:t>+ [time]</a:t>
             </a:r>
-            <a:pPr algn="l" indent="0" marL="0">
-              <a:buNone/>
-            </a:pPr>
             <a:r>
               <a:rPr lang="en-US" sz="1500" dirty="0">
                 <a:solidFill>
@@ -2806,9 +2794,6 @@
               </a:rPr>
               <a:t> </a:t>
             </a:r>
-            <a:pPr algn="l" indent="0" marL="0">
-              <a:buNone/>
-            </a:pPr>
             <a:r>
               <a:rPr lang="en-US" sz="1100" b="1" dirty="0">
                 <a:solidFill>
@@ -2820,9 +2805,6 @@
               </a:rPr>
               <a:t>+ [verb]</a:t>
             </a:r>
-            <a:pPr algn="l" indent="0" marL="0">
-              <a:buNone/>
-            </a:pPr>
             <a:r>
               <a:rPr lang="en-US" sz="1500" dirty="0">
                 <a:solidFill>
@@ -3032,6 +3014,92 @@
               </a:rPr>
               <a:t>Sentence-starter template provided. Struggling students may write in the </a:t>
             </a:r>
+            <a:r>
+              <a:rPr lang="en-US" sz="1000" b="1" dirty="0">
+                <a:solidFill>
+                  <a:srgbClr val="5B6677"/>
+                </a:solidFill>
+                <a:latin typeface="Noto Sans SC" pitchFamily="34" charset="0"/>
+                <a:ea typeface="Noto Sans SC" pitchFamily="34" charset="-122"/>
+                <a:cs typeface="Noto Sans SC" pitchFamily="34" charset="-120"/>
+              </a:rPr>
+              <a:t>same order</a:t>
+            </a:r>
+            <a:r>
+              <a:rPr lang="en-US" sz="1000" dirty="0">
+                <a:solidFill>
+                  <a:srgbClr val="5B6677"/>
+                </a:solidFill>
+                <a:latin typeface="Noto Sans SC" pitchFamily="34" charset="0"/>
+                <a:ea typeface="Noto Sans SC" pitchFamily="34" charset="-122"/>
+                <a:cs typeface="Noto Sans SC" pitchFamily="34" charset="-120"/>
+              </a:rPr>
+              <a:t> as the interview questions.</a:t>
+            </a:r>
+            <a:endParaRPr lang="en-US" sz="1000" dirty="0"/>
+          </a:p>
+        </p:txBody>
+      </p:sp>
+      <p:sp>
+        <p:nvSpPr>
+          <p:cNvPr id="18" name="Text 16"/>
+          <p:cNvSpPr/>
+          <p:nvPr/>
+        </p:nvSpPr>
+        <p:spPr>
+          <a:xfrm>
+            <a:off x="4349651" y="2961977"/>
+            <a:ext cx="3562552" cy="161925"/>
+          </a:xfrm>
+          <a:prstGeom prst="rect">
+            <a:avLst/>
+          </a:prstGeom>
+          <a:noFill/>
+          <a:ln/>
+        </p:spPr>
+        <p:txBody>
+          <a:bodyPr wrap="square" lIns="0" tIns="0" rIns="0" bIns="0" rtlCol="0" anchor="t"/>
+          <a:lstStyle/>
+          <a:p>
+            <a:pPr algn="l" indent="0" marL="0">
+              <a:buNone/>
+            </a:pPr>
+            <a:r>
+              <a:rPr lang="en-US" sz="900" b="1" dirty="0">
+                <a:solidFill>
+                  <a:srgbClr val="D4756B"/>
+                </a:solidFill>
+                <a:latin typeface="Noto Sans SC" pitchFamily="34" charset="0"/>
+                <a:ea typeface="Noto Sans SC" pitchFamily="34" charset="-122"/>
+                <a:cs typeface="Noto Sans SC" pitchFamily="34" charset="-120"/>
+              </a:rPr>
+              <a:t>EXTENSION</a:t>
+            </a:r>
+            <a:endParaRPr lang="en-US" sz="900" dirty="0"/>
+          </a:p>
+        </p:txBody>
+      </p:sp>
+      <p:sp>
+        <p:nvSpPr>
+          <p:cNvPr id="19" name="Text 17"/>
+          <p:cNvSpPr/>
+          <p:nvPr/>
+        </p:nvSpPr>
+        <p:spPr>
+          <a:xfrm>
+            <a:off x="4349651" y="3162002"/>
+            <a:ext cx="3562552" cy="542925"/>
+          </a:xfrm>
+          <a:prstGeom prst="rect">
+            <a:avLst/>
+          </a:prstGeom>
+          <a:noFill/>
+          <a:ln/>
+        </p:spPr>
+        <p:txBody>
+          <a:bodyPr wrap="square" lIns="0" tIns="0" rIns="0" bIns="0" rtlCol="0" anchor="t"/>
+          <a:lstStyle/>
+          <a:p>
             <a:pPr algn="l" indent="0" marL="0">
               <a:spcBef>
                 <a:spcPts val="300"/>
@@ -3039,6 +3107,17 @@
               <a:buNone/>
             </a:pPr>
             <a:r>
+              <a:rPr lang="en-US" sz="1000" dirty="0">
+                <a:solidFill>
+                  <a:srgbClr val="5B6677"/>
+                </a:solidFill>
+                <a:latin typeface="Noto Sans SC" pitchFamily="34" charset="0"/>
+                <a:ea typeface="Noto Sans SC" pitchFamily="34" charset="-122"/>
+                <a:cs typeface="Noto Sans SC" pitchFamily="34" charset="-120"/>
+              </a:rPr>
+              <a:t>Combine sentences using time-of-day words: </a:t>
+            </a:r>
+            <a:r>
               <a:rPr lang="en-US" sz="1000" b="1" dirty="0">
                 <a:solidFill>
                   <a:srgbClr val="5B6677"/>
@@ -3047,8 +3126,83 @@
                 <a:ea typeface="Noto Sans SC" pitchFamily="34" charset="-122"/>
                 <a:cs typeface="Noto Sans SC" pitchFamily="34" charset="-120"/>
               </a:rPr>
-              <a:t>same order</a:t>
-            </a:r>
+              <a:t>他早上七点起床，七点半吃早饭</a:t>
+            </a:r>
+            <a:r>
+              <a:rPr lang="en-US" sz="1000" dirty="0">
+                <a:solidFill>
+                  <a:srgbClr val="5B6677"/>
+                </a:solidFill>
+                <a:latin typeface="Noto Sans SC" pitchFamily="34" charset="0"/>
+                <a:ea typeface="Noto Sans SC" pitchFamily="34" charset="-122"/>
+                <a:cs typeface="Noto Sans SC" pitchFamily="34" charset="-120"/>
+              </a:rPr>
+              <a:t> — and add one sentence about a sport/activity from Lesson 6.</a:t>
+            </a:r>
+            <a:endParaRPr lang="en-US" sz="1000" dirty="0"/>
+          </a:p>
+        </p:txBody>
+      </p:sp>
+      <p:sp>
+        <p:nvSpPr>
+          <p:cNvPr id="20" name="Text 18"/>
+          <p:cNvSpPr/>
+          <p:nvPr/>
+        </p:nvSpPr>
+        <p:spPr>
+          <a:xfrm>
+            <a:off x="8045500" y="2961977"/>
+            <a:ext cx="3562401" cy="161925"/>
+          </a:xfrm>
+          <a:prstGeom prst="rect">
+            <a:avLst/>
+          </a:prstGeom>
+          <a:noFill/>
+          <a:ln/>
+        </p:spPr>
+        <p:txBody>
+          <a:bodyPr wrap="square" lIns="0" tIns="0" rIns="0" bIns="0" rtlCol="0" anchor="t"/>
+          <a:lstStyle/>
+          <a:p>
+            <a:pPr algn="l" indent="0" marL="0">
+              <a:buNone/>
+            </a:pPr>
+            <a:r>
+              <a:rPr lang="en-US" sz="900" b="1" dirty="0">
+                <a:solidFill>
+                  <a:srgbClr val="D4756B"/>
+                </a:solidFill>
+                <a:latin typeface="Noto Sans SC" pitchFamily="34" charset="0"/>
+                <a:ea typeface="Noto Sans SC" pitchFamily="34" charset="-122"/>
+                <a:cs typeface="Noto Sans SC" pitchFamily="34" charset="-120"/>
+              </a:rPr>
+              <a:t>OTR</a:t>
+            </a:r>
+            <a:endParaRPr lang="en-US" sz="900" dirty="0"/>
+          </a:p>
+        </p:txBody>
+      </p:sp>
+      <p:sp>
+        <p:nvSpPr>
+          <p:cNvPr id="21" name="Text 19"/>
+          <p:cNvSpPr/>
+          <p:nvPr/>
+        </p:nvSpPr>
+        <p:spPr>
+          <a:xfrm>
+            <a:off x="8045500" y="3162002"/>
+            <a:ext cx="3562401" cy="542925"/>
+          </a:xfrm>
+          <a:prstGeom prst="rect">
+            <a:avLst/>
+          </a:prstGeom>
+          <a:noFill/>
+          <a:ln/>
+        </p:spPr>
+        <p:txBody>
+          <a:bodyPr wrap="square" lIns="0" tIns="0" rIns="0" bIns="0" rtlCol="0" anchor="t"/>
+          <a:lstStyle/>
+          <a:p>
             <a:pPr algn="l" indent="0" marL="0">
               <a:spcBef>
                 <a:spcPts val="300"/>
@@ -3056,7 +3210,7 @@
               <a:buNone/>
             </a:pPr>
             <a:r>
-              <a:rPr lang="en-US" sz="1000" dirty="0">
+              <a:rPr lang="en-US" sz="1000" b="1" dirty="0">
                 <a:solidFill>
                   <a:srgbClr val="5B6677"/>
                 </a:solidFill>
@@ -3064,210 +3218,8 @@
                 <a:ea typeface="Noto Sans SC" pitchFamily="34" charset="-122"/>
                 <a:cs typeface="Noto Sans SC" pitchFamily="34" charset="-120"/>
               </a:rPr>
-              <a:t> as the interview questions.</a:t>
-            </a:r>
-            <a:endParaRPr lang="en-US" sz="1000" dirty="0"/>
-          </a:p>
-        </p:txBody>
-      </p:sp>
-      <p:sp>
-        <p:nvSpPr>
-          <p:cNvPr id="18" name="Text 16"/>
-          <p:cNvSpPr/>
-          <p:nvPr/>
-        </p:nvSpPr>
-        <p:spPr>
-          <a:xfrm>
-            <a:off x="4349651" y="2961977"/>
-            <a:ext cx="3562552" cy="161925"/>
-          </a:xfrm>
-          <a:prstGeom prst="rect">
-            <a:avLst/>
-          </a:prstGeom>
-          <a:noFill/>
-          <a:ln/>
-        </p:spPr>
-        <p:txBody>
-          <a:bodyPr wrap="square" lIns="0" tIns="0" rIns="0" bIns="0" rtlCol="0" anchor="t"/>
-          <a:lstStyle/>
-          <a:p>
-            <a:pPr algn="l" indent="0" marL="0">
-              <a:buNone/>
-            </a:pPr>
-            <a:r>
-              <a:rPr lang="en-US" sz="900" b="1" dirty="0">
-                <a:solidFill>
-                  <a:srgbClr val="D4756B"/>
-                </a:solidFill>
-                <a:latin typeface="Noto Sans SC" pitchFamily="34" charset="0"/>
-                <a:ea typeface="Noto Sans SC" pitchFamily="34" charset="-122"/>
-                <a:cs typeface="Noto Sans SC" pitchFamily="34" charset="-120"/>
-              </a:rPr>
-              <a:t>EXTENSION</a:t>
-            </a:r>
-            <a:endParaRPr lang="en-US" sz="900" dirty="0"/>
-          </a:p>
-        </p:txBody>
-      </p:sp>
-      <p:sp>
-        <p:nvSpPr>
-          <p:cNvPr id="19" name="Text 17"/>
-          <p:cNvSpPr/>
-          <p:nvPr/>
-        </p:nvSpPr>
-        <p:spPr>
-          <a:xfrm>
-            <a:off x="4349651" y="3162002"/>
-            <a:ext cx="3562552" cy="542925"/>
-          </a:xfrm>
-          <a:prstGeom prst="rect">
-            <a:avLst/>
-          </a:prstGeom>
-          <a:noFill/>
-          <a:ln/>
-        </p:spPr>
-        <p:txBody>
-          <a:bodyPr wrap="square" lIns="0" tIns="0" rIns="0" bIns="0" rtlCol="0" anchor="t"/>
-          <a:lstStyle/>
-          <a:p>
-            <a:pPr algn="l" indent="0" marL="0">
-              <a:spcBef>
-                <a:spcPts val="300"/>
-              </a:spcBef>
-              <a:buNone/>
-            </a:pPr>
-            <a:r>
-              <a:rPr lang="en-US" sz="1000" dirty="0">
-                <a:solidFill>
-                  <a:srgbClr val="5B6677"/>
-                </a:solidFill>
-                <a:latin typeface="Noto Sans SC" pitchFamily="34" charset="0"/>
-                <a:ea typeface="Noto Sans SC" pitchFamily="34" charset="-122"/>
-                <a:cs typeface="Noto Sans SC" pitchFamily="34" charset="-120"/>
-              </a:rPr>
-              <a:t>Combine sentences using time-of-day words: </a:t>
-            </a:r>
-            <a:pPr algn="l" indent="0" marL="0">
-              <a:spcBef>
-                <a:spcPts val="300"/>
-              </a:spcBef>
-              <a:buNone/>
-            </a:pPr>
-            <a:r>
-              <a:rPr lang="en-US" sz="1000" b="1" dirty="0">
-                <a:solidFill>
-                  <a:srgbClr val="5B6677"/>
-                </a:solidFill>
-                <a:latin typeface="Noto Sans SC" pitchFamily="34" charset="0"/>
-                <a:ea typeface="Noto Sans SC" pitchFamily="34" charset="-122"/>
-                <a:cs typeface="Noto Sans SC" pitchFamily="34" charset="-120"/>
-              </a:rPr>
-              <a:t>他早上七点起床，七点半吃早饭</a:t>
-            </a:r>
-            <a:pPr algn="l" indent="0" marL="0">
-              <a:spcBef>
-                <a:spcPts val="300"/>
-              </a:spcBef>
-              <a:buNone/>
-            </a:pPr>
-            <a:r>
-              <a:rPr lang="en-US" sz="1000" dirty="0">
-                <a:solidFill>
-                  <a:srgbClr val="5B6677"/>
-                </a:solidFill>
-                <a:latin typeface="Noto Sans SC" pitchFamily="34" charset="0"/>
-                <a:ea typeface="Noto Sans SC" pitchFamily="34" charset="-122"/>
-                <a:cs typeface="Noto Sans SC" pitchFamily="34" charset="-120"/>
-              </a:rPr>
-              <a:t> — and add one sentence about a sport/activity from Lesson 6.</a:t>
-            </a:r>
-            <a:endParaRPr lang="en-US" sz="1000" dirty="0"/>
-          </a:p>
-        </p:txBody>
-      </p:sp>
-      <p:sp>
-        <p:nvSpPr>
-          <p:cNvPr id="20" name="Text 18"/>
-          <p:cNvSpPr/>
-          <p:nvPr/>
-        </p:nvSpPr>
-        <p:spPr>
-          <a:xfrm>
-            <a:off x="8045500" y="2961977"/>
-            <a:ext cx="3562401" cy="161925"/>
-          </a:xfrm>
-          <a:prstGeom prst="rect">
-            <a:avLst/>
-          </a:prstGeom>
-          <a:noFill/>
-          <a:ln/>
-        </p:spPr>
-        <p:txBody>
-          <a:bodyPr wrap="square" lIns="0" tIns="0" rIns="0" bIns="0" rtlCol="0" anchor="t"/>
-          <a:lstStyle/>
-          <a:p>
-            <a:pPr algn="l" indent="0" marL="0">
-              <a:buNone/>
-            </a:pPr>
-            <a:r>
-              <a:rPr lang="en-US" sz="900" b="1" dirty="0">
-                <a:solidFill>
-                  <a:srgbClr val="D4756B"/>
-                </a:solidFill>
-                <a:latin typeface="Noto Sans SC" pitchFamily="34" charset="0"/>
-                <a:ea typeface="Noto Sans SC" pitchFamily="34" charset="-122"/>
-                <a:cs typeface="Noto Sans SC" pitchFamily="34" charset="-120"/>
-              </a:rPr>
-              <a:t>OTR</a:t>
-            </a:r>
-            <a:endParaRPr lang="en-US" sz="900" dirty="0"/>
-          </a:p>
-        </p:txBody>
-      </p:sp>
-      <p:sp>
-        <p:nvSpPr>
-          <p:cNvPr id="21" name="Text 19"/>
-          <p:cNvSpPr/>
-          <p:nvPr/>
-        </p:nvSpPr>
-        <p:spPr>
-          <a:xfrm>
-            <a:off x="8045500" y="3162002"/>
-            <a:ext cx="3562401" cy="542925"/>
-          </a:xfrm>
-          <a:prstGeom prst="rect">
-            <a:avLst/>
-          </a:prstGeom>
-          <a:noFill/>
-          <a:ln/>
-        </p:spPr>
-        <p:txBody>
-          <a:bodyPr wrap="square" lIns="0" tIns="0" rIns="0" bIns="0" rtlCol="0" anchor="t"/>
-          <a:lstStyle/>
-          <a:p>
-            <a:pPr algn="l" indent="0" marL="0">
-              <a:spcBef>
-                <a:spcPts val="300"/>
-              </a:spcBef>
-              <a:buNone/>
-            </a:pPr>
-            <a:r>
-              <a:rPr lang="en-US" sz="1000" b="1" dirty="0">
-                <a:solidFill>
-                  <a:srgbClr val="5B6677"/>
-                </a:solidFill>
-                <a:latin typeface="Noto Sans SC" pitchFamily="34" charset="0"/>
-                <a:ea typeface="Noto Sans SC" pitchFamily="34" charset="-122"/>
-                <a:cs typeface="Noto Sans SC" pitchFamily="34" charset="-120"/>
-              </a:rPr>
               <a:t>Pair-check</a:t>
             </a:r>
-            <a:pPr algn="l" indent="0" marL="0">
-              <a:spcBef>
-                <a:spcPts val="300"/>
-              </a:spcBef>
-              <a:buNone/>
-            </a:pPr>
             <a:r>
               <a:rPr lang="en-US" sz="1000" dirty="0">
                 <a:solidFill>
@@ -3815,9 +3767,6 @@
               </a:rPr>
               <a:t>1</a:t>
             </a:r>
-            <a:pPr algn="l" indent="0" marL="0">
-              <a:buNone/>
-            </a:pPr>
             <a:r>
               <a:rPr lang="en-US" sz="1100" dirty="0">
                 <a:solidFill>
@@ -3846,9 +3795,6 @@
               </a:rPr>
               <a:t>2</a:t>
             </a:r>
-            <a:pPr algn="l" indent="0" marL="0">
-              <a:buNone/>
-            </a:pPr>
             <a:r>
               <a:rPr lang="en-US" sz="1100" dirty="0">
                 <a:solidFill>
@@ -3877,9 +3823,6 @@
               </a:rPr>
               <a:t>3</a:t>
             </a:r>
-            <a:pPr algn="l" indent="0" marL="0">
-              <a:buNone/>
-            </a:pPr>
             <a:r>
               <a:rPr lang="en-US" sz="1100" dirty="0">
                 <a:solidFill>
@@ -3908,9 +3851,6 @@
               </a:rPr>
               <a:t>4</a:t>
             </a:r>
-            <a:pPr algn="l" indent="0" marL="0">
-              <a:buNone/>
-            </a:pPr>
             <a:r>
               <a:rPr lang="en-US" sz="1100" dirty="0">
                 <a:solidFill>
@@ -3939,9 +3879,6 @@
               </a:rPr>
               <a:t>5</a:t>
             </a:r>
-            <a:pPr algn="l" indent="0" marL="0">
-              <a:buNone/>
-            </a:pPr>
             <a:r>
               <a:rPr lang="en-US" sz="1100" dirty="0">
                 <a:solidFill>
@@ -3970,9 +3907,6 @@
               </a:rPr>
               <a:t>6</a:t>
             </a:r>
-            <a:pPr algn="l" indent="0" marL="0">
-              <a:buNone/>
-            </a:pPr>
             <a:r>
               <a:rPr lang="en-US" sz="1100" dirty="0">
                 <a:solidFill>
@@ -4001,9 +3935,6 @@
               </a:rPr>
               <a:t>7</a:t>
             </a:r>
-            <a:pPr algn="l" indent="0" marL="0">
-              <a:buNone/>
-            </a:pPr>
             <a:r>
               <a:rPr lang="en-US" sz="1100" dirty="0">
                 <a:solidFill>
@@ -4032,9 +3963,6 @@
               </a:rPr>
               <a:t>8</a:t>
             </a:r>
-            <a:pPr algn="l" indent="0" marL="0">
-              <a:buNone/>
-            </a:pPr>
             <a:r>
               <a:rPr lang="en-US" sz="1100" dirty="0">
                 <a:solidFill>
@@ -4864,9 +4792,6 @@
               </a:rPr>
               <a:t>1</a:t>
             </a:r>
-            <a:pPr algn="l" indent="0" marL="0">
-              <a:buNone/>
-            </a:pPr>
             <a:r>
               <a:rPr lang="en-US" sz="1200" dirty="0">
                 <a:solidFill>
@@ -4878,9 +4803,6 @@
               </a:rPr>
               <a:t> </a:t>
             </a:r>
-            <a:pPr algn="l" indent="0" marL="0">
-              <a:buNone/>
-            </a:pPr>
             <a:r>
               <a:rPr lang="en-US" sz="1200" b="1" dirty="0">
                 <a:solidFill>
@@ -4892,9 +4814,6 @@
               </a:rPr>
               <a:t>我早上六点半起床。</a:t>
             </a:r>
-            <a:pPr algn="l" indent="0" marL="0">
-              <a:buNone/>
-            </a:pPr>
             <a:r>
               <a:rPr lang="en-US" sz="1200" dirty="0">
                 <a:solidFill>
@@ -4906,9 +4825,6 @@
               </a:rPr>
               <a:t> </a:t>
             </a:r>
-            <a:pPr algn="l" indent="0" marL="0">
-              <a:buNone/>
-            </a:pPr>
             <a:r>
               <a:rPr lang="en-US" sz="1200" b="1" dirty="0">
                 <a:solidFill>
@@ -4937,9 +4853,6 @@
               </a:rPr>
               <a:t>2</a:t>
             </a:r>
-            <a:pPr algn="l" indent="0" marL="0">
-              <a:buNone/>
-            </a:pPr>
             <a:r>
               <a:rPr lang="en-US" sz="1200" dirty="0">
                 <a:solidFill>
@@ -4951,9 +4864,6 @@
               </a:rPr>
               <a:t> </a:t>
             </a:r>
-            <a:pPr algn="l" indent="0" marL="0">
-              <a:buNone/>
-            </a:pPr>
             <a:r>
               <a:rPr lang="en-US" sz="1200" b="1" dirty="0">
                 <a:solidFill>
@@ -4965,9 +4875,6 @@
               </a:rPr>
               <a:t>我早上七点吃早饭。</a:t>
             </a:r>
-            <a:pPr algn="l" indent="0" marL="0">
-              <a:buNone/>
-            </a:pPr>
             <a:r>
               <a:rPr lang="en-US" sz="1200" dirty="0">
                 <a:solidFill>
@@ -4979,9 +4886,6 @@
               </a:rPr>
               <a:t> </a:t>
             </a:r>
-            <a:pPr algn="l" indent="0" marL="0">
-              <a:buNone/>
-            </a:pPr>
             <a:r>
               <a:rPr lang="en-US" sz="1200" b="1" dirty="0">
                 <a:solidFill>
@@ -5010,9 +4914,6 @@
               </a:rPr>
               <a:t>3</a:t>
             </a:r>
-            <a:pPr algn="l" indent="0" marL="0">
-              <a:buNone/>
-            </a:pPr>
             <a:r>
               <a:rPr lang="en-US" sz="1200" dirty="0">
                 <a:solidFill>
@@ -5024,9 +4925,6 @@
               </a:rPr>
               <a:t> </a:t>
             </a:r>
-            <a:pPr algn="l" indent="0" marL="0">
-              <a:buNone/>
-            </a:pPr>
             <a:r>
               <a:rPr lang="en-US" sz="1200" b="1" dirty="0">
                 <a:solidFill>
@@ -5038,9 +4936,6 @@
               </a:rPr>
               <a:t>我早上七点四十五去上学。</a:t>
             </a:r>
-            <a:pPr algn="l" indent="0" marL="0">
-              <a:buNone/>
-            </a:pPr>
             <a:r>
               <a:rPr lang="en-US" sz="1200" dirty="0">
                 <a:solidFill>
@@ -5052,9 +4947,6 @@
               </a:rPr>
               <a:t> </a:t>
             </a:r>
-            <a:pPr algn="l" indent="0" marL="0">
-              <a:buNone/>
-            </a:pPr>
             <a:r>
               <a:rPr lang="en-US" sz="1200" b="1" dirty="0">
                 <a:solidFill>
@@ -5083,9 +4975,6 @@
               </a:rPr>
               <a:t>4</a:t>
             </a:r>
-            <a:pPr algn="l" indent="0" marL="0">
-              <a:buNone/>
-            </a:pPr>
             <a:r>
               <a:rPr lang="en-US" sz="1200" dirty="0">
                 <a:solidFill>
@@ -5097,9 +4986,6 @@
               </a:rPr>
               <a:t> </a:t>
             </a:r>
-            <a:pPr algn="l" indent="0" marL="0">
-              <a:buNone/>
-            </a:pPr>
             <a:r>
               <a:rPr lang="en-US" sz="1200" b="1" dirty="0">
                 <a:solidFill>
@@ -5111,9 +4997,6 @@
               </a:rPr>
               <a:t>我们八点半上课。</a:t>
             </a:r>
-            <a:pPr algn="l" indent="0" marL="0">
-              <a:buNone/>
-            </a:pPr>
             <a:r>
               <a:rPr lang="en-US" sz="1200" dirty="0">
                 <a:solidFill>
@@ -5125,9 +5008,6 @@
               </a:rPr>
               <a:t> </a:t>
             </a:r>
-            <a:pPr algn="l" indent="0" marL="0">
-              <a:buNone/>
-            </a:pPr>
             <a:r>
               <a:rPr lang="en-US" sz="1200" b="1" dirty="0">
                 <a:solidFill>
@@ -5156,9 +5036,6 @@
               </a:rPr>
               <a:t>5</a:t>
             </a:r>
-            <a:pPr algn="l" indent="0" marL="0">
-              <a:buNone/>
-            </a:pPr>
             <a:r>
               <a:rPr lang="en-US" sz="1200" dirty="0">
                 <a:solidFill>
@@ -5170,9 +5047,6 @@
               </a:rPr>
               <a:t> </a:t>
             </a:r>
-            <a:pPr algn="l" indent="0" marL="0">
-              <a:buNone/>
-            </a:pPr>
             <a:r>
               <a:rPr lang="en-US" sz="1200" b="1" dirty="0">
                 <a:solidFill>
@@ -5184,9 +5058,6 @@
               </a:rPr>
               <a:t>我十二点一刻吃午饭。</a:t>
             </a:r>
-            <a:pPr algn="l" indent="0" marL="0">
-              <a:buNone/>
-            </a:pPr>
             <a:r>
               <a:rPr lang="en-US" sz="1200" dirty="0">
                 <a:solidFill>
@@ -5198,9 +5069,6 @@
               </a:rPr>
               <a:t> </a:t>
             </a:r>
-            <a:pPr algn="l" indent="0" marL="0">
-              <a:buNone/>
-            </a:pPr>
             <a:r>
               <a:rPr lang="en-US" sz="1200" b="1" dirty="0">
                 <a:solidFill>
@@ -5229,9 +5097,6 @@
               </a:rPr>
               <a:t>6</a:t>
             </a:r>
-            <a:pPr algn="l" indent="0" marL="0">
-              <a:buNone/>
-            </a:pPr>
             <a:r>
               <a:rPr lang="en-US" sz="1200" dirty="0">
                 <a:solidFill>
@@ -5243,9 +5108,6 @@
               </a:rPr>
               <a:t> </a:t>
             </a:r>
-            <a:pPr algn="l" indent="0" marL="0">
-              <a:buNone/>
-            </a:pPr>
             <a:r>
               <a:rPr lang="en-US" sz="1200" b="1" dirty="0">
                 <a:solidFill>
@@ -5257,9 +5119,6 @@
               </a:rPr>
               <a:t>我们下午三点半放学。</a:t>
             </a:r>
-            <a:pPr algn="l" indent="0" marL="0">
-              <a:buNone/>
-            </a:pPr>
             <a:r>
               <a:rPr lang="en-US" sz="1200" dirty="0">
                 <a:solidFill>
@@ -5271,9 +5130,6 @@
               </a:rPr>
               <a:t> </a:t>
             </a:r>
-            <a:pPr algn="l" indent="0" marL="0">
-              <a:buNone/>
-            </a:pPr>
             <a:r>
               <a:rPr lang="en-US" sz="1200" b="1" dirty="0">
                 <a:solidFill>
@@ -5302,9 +5158,6 @@
               </a:rPr>
               <a:t>7</a:t>
             </a:r>
-            <a:pPr algn="l" indent="0" marL="0">
-              <a:buNone/>
-            </a:pPr>
             <a:r>
               <a:rPr lang="en-US" sz="1200" dirty="0">
                 <a:solidFill>
@@ -5316,9 +5169,6 @@
               </a:rPr>
               <a:t> </a:t>
             </a:r>
-            <a:pPr algn="l" indent="0" marL="0">
-              <a:buNone/>
-            </a:pPr>
             <a:r>
               <a:rPr lang="en-US" sz="1200" b="1" dirty="0">
                 <a:solidFill>
@@ -5330,9 +5180,6 @@
               </a:rPr>
               <a:t>我晚上六点吃晚饭。</a:t>
             </a:r>
-            <a:pPr algn="l" indent="0" marL="0">
-              <a:buNone/>
-            </a:pPr>
             <a:r>
               <a:rPr lang="en-US" sz="1200" dirty="0">
                 <a:solidFill>
@@ -5344,9 +5191,6 @@
               </a:rPr>
               <a:t> </a:t>
             </a:r>
-            <a:pPr algn="l" indent="0" marL="0">
-              <a:buNone/>
-            </a:pPr>
             <a:r>
               <a:rPr lang="en-US" sz="1200" b="1" dirty="0">
                 <a:solidFill>
@@ -5375,9 +5219,6 @@
               </a:rPr>
               <a:t>8</a:t>
             </a:r>
-            <a:pPr algn="l" indent="0" marL="0">
-              <a:buNone/>
-            </a:pPr>
             <a:r>
               <a:rPr lang="en-US" sz="1200" dirty="0">
                 <a:solidFill>
@@ -5389,9 +5230,6 @@
               </a:rPr>
               <a:t> </a:t>
             </a:r>
-            <a:pPr algn="l" indent="0" marL="0">
-              <a:buNone/>
-            </a:pPr>
             <a:r>
               <a:rPr lang="en-US" sz="1200" b="1" dirty="0">
                 <a:solidFill>
@@ -5403,9 +5241,6 @@
               </a:rPr>
               <a:t>我晚上十点睡觉。</a:t>
             </a:r>
-            <a:pPr algn="l" indent="0" marL="0">
-              <a:buNone/>
-            </a:pPr>
             <a:r>
               <a:rPr lang="en-US" sz="1200" dirty="0">
                 <a:solidFill>
@@ -5417,9 +5252,6 @@
               </a:rPr>
               <a:t> </a:t>
             </a:r>
-            <a:pPr algn="l" indent="0" marL="0">
-              <a:buNone/>
-            </a:pPr>
             <a:r>
               <a:rPr lang="en-US" sz="1200" b="1" dirty="0">
                 <a:solidFill>
@@ -6905,12 +6737,6 @@
               </a:rPr>
               <a:t>On paper: "Which of the 8 questions can you now ask </a:t>
             </a:r>
-            <a:pPr algn="l" indent="0" marL="0">
-              <a:spcBef>
-                <a:spcPts val="500"/>
-              </a:spcBef>
-              <a:buNone/>
-            </a:pPr>
             <a:r>
               <a:rPr lang="en-US" sz="1100" b="1" dirty="0">
                 <a:solidFill>
@@ -6922,12 +6748,6 @@
               </a:rPr>
               <a:t>without checking the sheet</a:t>
             </a:r>
-            <a:pPr algn="l" indent="0" marL="0">
-              <a:spcBef>
-                <a:spcPts val="500"/>
-              </a:spcBef>
-              <a:buNone/>
-            </a:pPr>
             <a:r>
               <a:rPr lang="en-US" sz="1100" dirty="0">
                 <a:solidFill>
@@ -7056,12 +6876,6 @@
               </a:rPr>
               <a:t>Write </a:t>
             </a:r>
-            <a:pPr algn="l" indent="0" marL="0">
-              <a:spcBef>
-                <a:spcPts val="500"/>
-              </a:spcBef>
-              <a:buNone/>
-            </a:pPr>
             <a:r>
               <a:rPr lang="en-US" sz="1100" b="1" dirty="0">
                 <a:solidFill>
@@ -7073,12 +6887,6 @@
               </a:rPr>
               <a:t>one sentence</a:t>
             </a:r>
-            <a:pPr algn="l" indent="0" marL="0">
-              <a:spcBef>
-                <a:spcPts val="500"/>
-              </a:spcBef>
-              <a:buNone/>
-            </a:pPr>
             <a:r>
               <a:rPr lang="en-US" sz="1100" dirty="0">
                 <a:solidFill>
@@ -7090,12 +6898,6 @@
               </a:rPr>
               <a:t> from your partner's report using </a:t>
             </a:r>
-            <a:pPr algn="l" indent="0" marL="0">
-              <a:spcBef>
-                <a:spcPts val="500"/>
-              </a:spcBef>
-              <a:buNone/>
-            </a:pPr>
             <a:r>
               <a:rPr lang="en-US" sz="1100" b="1" dirty="0">
                 <a:solidFill>
@@ -7107,12 +6909,6 @@
               </a:rPr>
               <a:t>他</a:t>
             </a:r>
-            <a:pPr algn="l" indent="0" marL="0">
-              <a:spcBef>
-                <a:spcPts val="500"/>
-              </a:spcBef>
-              <a:buNone/>
-            </a:pPr>
             <a:r>
               <a:rPr lang="en-US" sz="1100" dirty="0">
                 <a:solidFill>
@@ -7124,12 +6920,6 @@
               </a:rPr>
               <a:t> or </a:t>
             </a:r>
-            <a:pPr algn="l" indent="0" marL="0">
-              <a:spcBef>
-                <a:spcPts val="500"/>
-              </a:spcBef>
-              <a:buNone/>
-            </a:pPr>
             <a:r>
               <a:rPr lang="en-US" sz="1100" b="1" dirty="0">
                 <a:solidFill>
@@ -7141,12 +6931,6 @@
               </a:rPr>
               <a:t>她</a:t>
             </a:r>
-            <a:pPr algn="l" indent="0" marL="0">
-              <a:spcBef>
-                <a:spcPts val="500"/>
-              </a:spcBef>
-              <a:buNone/>
-            </a:pPr>
             <a:r>
               <a:rPr lang="en-US" sz="1100" dirty="0">
                 <a:solidFill>
@@ -7670,12 +7454,6 @@
               </a:rPr>
               <a:t>Today: </a:t>
             </a:r>
-            <a:pPr algn="ctr" indent="0" marL="0">
-              <a:spcBef>
-                <a:spcPts val="2000"/>
-              </a:spcBef>
-              <a:buNone/>
-            </a:pPr>
             <a:r>
               <a:rPr lang="en-US" sz="1300" b="1" dirty="0">
                 <a:solidFill>
@@ -7687,12 +7465,6 @@
               </a:rPr>
               <a:t>采访 (cǎifǎng)</a:t>
             </a:r>
-            <a:pPr algn="ctr" indent="0" marL="0">
-              <a:spcBef>
-                <a:spcPts val="2000"/>
-              </a:spcBef>
-              <a:buNone/>
-            </a:pPr>
             <a:r>
               <a:rPr lang="en-US" sz="1300" dirty="0">
                 <a:solidFill>
@@ -7704,12 +7476,6 @@
               </a:rPr>
               <a:t> = interview · </a:t>
             </a:r>
-            <a:pPr algn="ctr" indent="0" marL="0">
-              <a:spcBef>
-                <a:spcPts val="2000"/>
-              </a:spcBef>
-              <a:buNone/>
-            </a:pPr>
             <a:r>
               <a:rPr lang="en-US" sz="1300" b="1" dirty="0">
                 <a:solidFill>
@@ -7721,12 +7487,6 @@
               </a:rPr>
               <a:t>报告 (bàogào)</a:t>
             </a:r>
-            <a:pPr algn="ctr" indent="0" marL="0">
-              <a:spcBef>
-                <a:spcPts val="2000"/>
-              </a:spcBef>
-              <a:buNone/>
-            </a:pPr>
             <a:r>
               <a:rPr lang="en-US" sz="1300" dirty="0">
                 <a:solidFill>
@@ -8770,9 +8530,6 @@
               </a:rPr>
               <a:t>🔗 Connection: You can describe </a:t>
             </a:r>
-            <a:pPr algn="l" indent="0" marL="0">
-              <a:buNone/>
-            </a:pPr>
             <a:r>
               <a:rPr lang="en-US" sz="1100" b="1" dirty="0">
                 <a:solidFill>
@@ -8784,9 +8541,6 @@
               </a:rPr>
               <a:t>your own</a:t>
             </a:r>
-            <a:pPr algn="l" indent="0" marL="0">
-              <a:buNone/>
-            </a:pPr>
             <a:r>
               <a:rPr lang="en-US" sz="1100" dirty="0">
                 <a:solidFill>
@@ -8798,9 +8552,6 @@
               </a:rPr>
               <a:t> day. Today you find out about </a:t>
             </a:r>
-            <a:pPr algn="l" indent="0" marL="0">
-              <a:buNone/>
-            </a:pPr>
             <a:r>
               <a:rPr lang="en-US" sz="1100" b="1" dirty="0">
                 <a:solidFill>
@@ -8812,9 +8563,6 @@
               </a:rPr>
               <a:t>someone else's</a:t>
             </a:r>
-            <a:pPr algn="l" indent="0" marL="0">
-              <a:buNone/>
-            </a:pPr>
             <a:r>
               <a:rPr lang="en-US" sz="1100" dirty="0">
                 <a:solidFill>
@@ -9210,12 +8958,6 @@
               </a:rPr>
               <a:t>We are learning to </a:t>
             </a:r>
-            <a:pPr algn="l" indent="0" marL="0">
-              <a:spcBef>
-                <a:spcPts val="400"/>
-              </a:spcBef>
-              <a:buNone/>
-            </a:pPr>
             <a:r>
               <a:rPr lang="en-US" sz="1400" b="1" dirty="0">
                 <a:solidFill>
@@ -9227,12 +8969,6 @@
               </a:rPr>
               <a:t>interview a classmate</a:t>
             </a:r>
-            <a:pPr algn="l" indent="0" marL="0">
-              <a:spcBef>
-                <a:spcPts val="400"/>
-              </a:spcBef>
-              <a:buNone/>
-            </a:pPr>
             <a:r>
               <a:rPr lang="en-US" sz="1400" dirty="0">
                 <a:solidFill>
@@ -9244,12 +8980,6 @@
               </a:rPr>
               <a:t> about their daily routine and </a:t>
             </a:r>
-            <a:pPr algn="l" indent="0" marL="0">
-              <a:spcBef>
-                <a:spcPts val="400"/>
-              </a:spcBef>
-              <a:buNone/>
-            </a:pPr>
             <a:r>
               <a:rPr lang="en-US" sz="1400" b="1" dirty="0">
                 <a:solidFill>
@@ -9261,12 +8991,6 @@
               </a:rPr>
               <a:t>write up</a:t>
             </a:r>
-            <a:pPr algn="l" indent="0" marL="0">
-              <a:spcBef>
-                <a:spcPts val="400"/>
-              </a:spcBef>
-              <a:buNone/>
-            </a:pPr>
             <a:r>
               <a:rPr lang="en-US" sz="1400" dirty="0">
                 <a:solidFill>
@@ -9388,9 +9112,6 @@
               </a:rPr>
               <a:t>I can ask all </a:t>
             </a:r>
-            <a:pPr algn="l" indent="0" marL="0">
-              <a:buNone/>
-            </a:pPr>
             <a:r>
               <a:rPr lang="en-US" sz="1200" b="1" dirty="0">
                 <a:solidFill>
@@ -9402,9 +9123,6 @@
               </a:rPr>
               <a:t>8 interview questions</a:t>
             </a:r>
-            <a:pPr algn="l" indent="0" marL="0">
-              <a:buNone/>
-            </a:pPr>
             <a:r>
               <a:rPr lang="en-US" sz="1200" dirty="0">
                 <a:solidFill>
@@ -9417,9 +9135,6 @@
               <a:t> about someone's daily routine.
 </a:t>
             </a:r>
-            <a:pPr algn="l" indent="0" marL="0">
-              <a:buNone/>
-            </a:pPr>
             <a:r>
               <a:rPr lang="en-US" sz="900" dirty="0">
                 <a:solidFill>
@@ -9541,9 +9256,6 @@
               </a:rPr>
               <a:t>I can write a </a:t>
             </a:r>
-            <a:pPr algn="l" indent="0" marL="0">
-              <a:buNone/>
-            </a:pPr>
             <a:r>
               <a:rPr lang="en-US" sz="1200" b="1" dirty="0">
                 <a:solidFill>
@@ -9555,9 +9267,6 @@
               </a:rPr>
               <a:t>short report</a:t>
             </a:r>
-            <a:pPr algn="l" indent="0" marL="0">
-              <a:buNone/>
-            </a:pPr>
             <a:r>
               <a:rPr lang="en-US" sz="1200" dirty="0">
                 <a:solidFill>
@@ -9570,9 +9279,6 @@
               <a:t> about my partner's routine in Chinese.
 </a:t>
             </a:r>
-            <a:pPr algn="l" indent="0" marL="0">
-              <a:buNone/>
-            </a:pPr>
             <a:r>
               <a:rPr lang="en-US" sz="900" dirty="0">
                 <a:solidFill>
@@ -9694,9 +9400,6 @@
               </a:rPr>
               <a:t>I can </a:t>
             </a:r>
-            <a:pPr algn="l" indent="0" marL="0">
-              <a:buNone/>
-            </a:pPr>
             <a:r>
               <a:rPr lang="en-US" sz="1200" b="1" dirty="0">
                 <a:solidFill>
@@ -9708,9 +9411,6 @@
               </a:rPr>
               <a:t>listen and correctly tick</a:t>
             </a:r>
-            <a:pPr algn="l" indent="0" marL="0">
-              <a:buNone/>
-            </a:pPr>
             <a:r>
               <a:rPr lang="en-US" sz="1200" dirty="0">
                 <a:solidFill>
@@ -9723,9 +9423,6 @@
               <a:t> the time and activity I hear.
 </a:t>
             </a:r>
-            <a:pPr algn="l" indent="0" marL="0">
-              <a:buNone/>
-            </a:pPr>
             <a:r>
               <a:rPr lang="en-US" sz="900" dirty="0">
                 <a:solidFill>
@@ -10056,9 +9753,6 @@
               </a:rPr>
               <a:t>早饭</a:t>
             </a:r>
-            <a:pPr algn="l" indent="0" marL="0">
-              <a:buNone/>
-            </a:pPr>
             <a:r>
               <a:rPr lang="en-US" sz="1300" dirty="0">
                 <a:solidFill>
@@ -10070,9 +9764,6 @@
               </a:rPr>
               <a:t> </a:t>
             </a:r>
-            <a:pPr algn="l" indent="0" marL="0">
-              <a:buNone/>
-            </a:pPr>
             <a:r>
               <a:rPr lang="en-US" sz="1300" dirty="0">
                 <a:solidFill>
@@ -10084,9 +9775,6 @@
               </a:rPr>
               <a:t>zǎo fàn</a:t>
             </a:r>
-            <a:pPr algn="l" indent="0" marL="0">
-              <a:buNone/>
-            </a:pPr>
             <a:r>
               <a:rPr lang="en-US" sz="1300" dirty="0">
                 <a:solidFill>
@@ -10098,9 +9786,6 @@
               </a:rPr>
               <a:t> </a:t>
             </a:r>
-            <a:pPr algn="l" indent="0" marL="0">
-              <a:buNone/>
-            </a:pPr>
             <a:r>
               <a:rPr lang="en-US" sz="1300" dirty="0">
                 <a:solidFill>
@@ -10112,9 +9797,6 @@
               </a:rPr>
               <a:t>breakfast</a:t>
             </a:r>
-            <a:pPr algn="l" indent="0" marL="0">
-              <a:buNone/>
-            </a:pPr>
             <a:r>
               <a:rPr lang="en-US" sz="1300" dirty="0">
                 <a:solidFill>
@@ -10126,9 +9808,6 @@
               </a:rPr>
               <a:t> </a:t>
             </a:r>
-            <a:pPr algn="l" indent="0" marL="0">
-              <a:buNone/>
-            </a:pPr>
             <a:r>
               <a:rPr lang="en-US" sz="1300" b="1" dirty="0">
                 <a:solidFill>
@@ -10157,9 +9836,6 @@
               </a:rPr>
               <a:t>午饭</a:t>
             </a:r>
-            <a:pPr algn="l" indent="0" marL="0">
-              <a:buNone/>
-            </a:pPr>
             <a:r>
               <a:rPr lang="en-US" sz="1300" dirty="0">
                 <a:solidFill>
@@ -10171,9 +9847,6 @@
               </a:rPr>
               <a:t> </a:t>
             </a:r>
-            <a:pPr algn="l" indent="0" marL="0">
-              <a:buNone/>
-            </a:pPr>
             <a:r>
               <a:rPr lang="en-US" sz="1300" dirty="0">
                 <a:solidFill>
@@ -10185,9 +9858,6 @@
               </a:rPr>
               <a:t>wǔ fàn</a:t>
             </a:r>
-            <a:pPr algn="l" indent="0" marL="0">
-              <a:buNone/>
-            </a:pPr>
             <a:r>
               <a:rPr lang="en-US" sz="1300" dirty="0">
                 <a:solidFill>
@@ -10199,9 +9869,6 @@
               </a:rPr>
               <a:t> </a:t>
             </a:r>
-            <a:pPr algn="l" indent="0" marL="0">
-              <a:buNone/>
-            </a:pPr>
             <a:r>
               <a:rPr lang="en-US" sz="1300" dirty="0">
                 <a:solidFill>
@@ -10213,9 +9880,6 @@
               </a:rPr>
               <a:t>lunch</a:t>
             </a:r>
-            <a:pPr algn="l" indent="0" marL="0">
-              <a:buNone/>
-            </a:pPr>
             <a:r>
               <a:rPr lang="en-US" sz="1300" dirty="0">
                 <a:solidFill>
@@ -10227,9 +9891,6 @@
               </a:rPr>
               <a:t> </a:t>
             </a:r>
-            <a:pPr algn="l" indent="0" marL="0">
-              <a:buNone/>
-            </a:pPr>
             <a:r>
               <a:rPr lang="en-US" sz="1300" b="1" dirty="0">
                 <a:solidFill>
@@ -10258,9 +9919,6 @@
               </a:rPr>
               <a:t>晚饭</a:t>
             </a:r>
-            <a:pPr algn="l" indent="0" marL="0">
-              <a:buNone/>
-            </a:pPr>
             <a:r>
               <a:rPr lang="en-US" sz="1300" dirty="0">
                 <a:solidFill>
@@ -10272,9 +9930,6 @@
               </a:rPr>
               <a:t> </a:t>
             </a:r>
-            <a:pPr algn="l" indent="0" marL="0">
-              <a:buNone/>
-            </a:pPr>
             <a:r>
               <a:rPr lang="en-US" sz="1300" dirty="0">
                 <a:solidFill>
@@ -10286,9 +9941,6 @@
               </a:rPr>
               <a:t>wǎn fàn</a:t>
             </a:r>
-            <a:pPr algn="l" indent="0" marL="0">
-              <a:buNone/>
-            </a:pPr>
             <a:r>
               <a:rPr lang="en-US" sz="1300" dirty="0">
                 <a:solidFill>
@@ -10300,9 +9952,6 @@
               </a:rPr>
               <a:t> </a:t>
             </a:r>
-            <a:pPr algn="l" indent="0" marL="0">
-              <a:buNone/>
-            </a:pPr>
             <a:r>
               <a:rPr lang="en-US" sz="1300" dirty="0">
                 <a:solidFill>
@@ -10314,9 +9963,6 @@
               </a:rPr>
               <a:t>dinner</a:t>
             </a:r>
-            <a:pPr algn="l" indent="0" marL="0">
-              <a:buNone/>
-            </a:pPr>
             <a:r>
               <a:rPr lang="en-US" sz="1300" dirty="0">
                 <a:solidFill>
@@ -10328,9 +9974,6 @@
               </a:rPr>
               <a:t> </a:t>
             </a:r>
-            <a:pPr algn="l" indent="0" marL="0">
-              <a:buNone/>
-            </a:pPr>
             <a:r>
               <a:rPr lang="en-US" sz="1300" b="1" dirty="0">
                 <a:solidFill>
@@ -10680,12 +10323,6 @@
               </a:rPr>
               <a:t>These follow the same pattern as 早饭: </a:t>
             </a:r>
-            <a:pPr algn="l" indent="0" marL="0">
-              <a:spcBef>
-                <a:spcPts val="300"/>
-              </a:spcBef>
-              <a:buNone/>
-            </a:pPr>
             <a:r>
               <a:rPr lang="en-US" sz="1100" b="1" dirty="0">
                 <a:solidFill>
@@ -10697,12 +10334,6 @@
               </a:rPr>
               <a:t>time word + 饭</a:t>
             </a:r>
-            <a:pPr algn="l" indent="0" marL="0">
-              <a:spcBef>
-                <a:spcPts val="300"/>
-              </a:spcBef>
-              <a:buNone/>
-            </a:pPr>
             <a:r>
               <a:rPr lang="en-US" sz="1100" dirty="0">
                 <a:solidFill>
@@ -11072,9 +10703,6 @@
               </a:rPr>
               <a:t>1</a:t>
             </a:r>
-            <a:pPr algn="l" indent="0" marL="0">
-              <a:buNone/>
-            </a:pPr>
             <a:r>
               <a:rPr lang="en-US" sz="1300" dirty="0">
                 <a:solidFill>
@@ -11086,9 +10714,6 @@
               </a:rPr>
               <a:t> </a:t>
             </a:r>
-            <a:pPr algn="l" indent="0" marL="0">
-              <a:buNone/>
-            </a:pPr>
             <a:r>
               <a:rPr lang="en-US" sz="1500" b="1" dirty="0">
                 <a:solidFill>
@@ -11100,9 +10725,6 @@
               </a:rPr>
               <a:t>你早上几点起床？</a:t>
             </a:r>
-            <a:pPr algn="l" indent="0" marL="0">
-              <a:buNone/>
-            </a:pPr>
             <a:r>
               <a:rPr lang="en-US" sz="1300" dirty="0">
                 <a:solidFill>
@@ -11114,9 +10736,6 @@
               </a:rPr>
               <a:t> </a:t>
             </a:r>
-            <a:pPr algn="l" indent="0" marL="0">
-              <a:buNone/>
-            </a:pPr>
             <a:r>
               <a:rPr lang="en-US" sz="1300" dirty="0">
                 <a:solidFill>
@@ -11128,9 +10747,6 @@
               </a:rPr>
               <a:t>wake up · </a:t>
             </a:r>
-            <a:pPr algn="l" indent="0" marL="0">
-              <a:buNone/>
-            </a:pPr>
             <a:r>
               <a:rPr lang="en-US" sz="1300" b="1" dirty="0">
                 <a:solidFill>
@@ -11159,9 +10775,6 @@
               </a:rPr>
               <a:t>2</a:t>
             </a:r>
-            <a:pPr algn="l" indent="0" marL="0">
-              <a:buNone/>
-            </a:pPr>
             <a:r>
               <a:rPr lang="en-US" sz="1300" dirty="0">
                 <a:solidFill>
@@ -11173,9 +10786,6 @@
               </a:rPr>
               <a:t> </a:t>
             </a:r>
-            <a:pPr algn="l" indent="0" marL="0">
-              <a:buNone/>
-            </a:pPr>
             <a:r>
               <a:rPr lang="en-US" sz="1500" b="1" dirty="0">
                 <a:solidFill>
@@ -11187,9 +10797,6 @@
               </a:rPr>
               <a:t>你几点吃早饭？</a:t>
             </a:r>
-            <a:pPr algn="l" indent="0" marL="0">
-              <a:buNone/>
-            </a:pPr>
             <a:r>
               <a:rPr lang="en-US" sz="1300" dirty="0">
                 <a:solidFill>
@@ -11201,9 +10808,6 @@
               </a:rPr>
               <a:t> </a:t>
             </a:r>
-            <a:pPr algn="l" indent="0" marL="0">
-              <a:buNone/>
-            </a:pPr>
             <a:r>
               <a:rPr lang="en-US" sz="1300" dirty="0">
                 <a:solidFill>
@@ -11215,9 +10819,6 @@
               </a:rPr>
               <a:t>breakfast · </a:t>
             </a:r>
-            <a:pPr algn="l" indent="0" marL="0">
-              <a:buNone/>
-            </a:pPr>
             <a:r>
               <a:rPr lang="en-US" sz="1300" b="1" dirty="0">
                 <a:solidFill>
@@ -11246,9 +10847,6 @@
               </a:rPr>
               <a:t>3</a:t>
             </a:r>
-            <a:pPr algn="l" indent="0" marL="0">
-              <a:buNone/>
-            </a:pPr>
             <a:r>
               <a:rPr lang="en-US" sz="1300" dirty="0">
                 <a:solidFill>
@@ -11260,9 +10858,6 @@
               </a:rPr>
               <a:t> </a:t>
             </a:r>
-            <a:pPr algn="l" indent="0" marL="0">
-              <a:buNone/>
-            </a:pPr>
             <a:r>
               <a:rPr lang="en-US" sz="1500" b="1" dirty="0">
                 <a:solidFill>
@@ -11274,9 +10869,6 @@
               </a:rPr>
               <a:t>你几点去上学？</a:t>
             </a:r>
-            <a:pPr algn="l" indent="0" marL="0">
-              <a:buNone/>
-            </a:pPr>
             <a:r>
               <a:rPr lang="en-US" sz="1300" dirty="0">
                 <a:solidFill>
@@ -11288,9 +10880,6 @@
               </a:rPr>
               <a:t> </a:t>
             </a:r>
-            <a:pPr algn="l" indent="0" marL="0">
-              <a:buNone/>
-            </a:pPr>
             <a:r>
               <a:rPr lang="en-US" sz="1300" dirty="0">
                 <a:solidFill>
@@ -11302,9 +10891,6 @@
               </a:rPr>
               <a:t>go to school · </a:t>
             </a:r>
-            <a:pPr algn="l" indent="0" marL="0">
-              <a:buNone/>
-            </a:pPr>
             <a:r>
               <a:rPr lang="en-US" sz="1300" b="1" dirty="0">
                 <a:solidFill>
@@ -11333,9 +10919,6 @@
               </a:rPr>
               <a:t>4</a:t>
             </a:r>
-            <a:pPr algn="l" indent="0" marL="0">
-              <a:buNone/>
-            </a:pPr>
             <a:r>
               <a:rPr lang="en-US" sz="1300" dirty="0">
                 <a:solidFill>
@@ -11347,9 +10930,6 @@
               </a:rPr>
               <a:t> </a:t>
             </a:r>
-            <a:pPr algn="l" indent="0" marL="0">
-              <a:buNone/>
-            </a:pPr>
             <a:r>
               <a:rPr lang="en-US" sz="1500" b="1" dirty="0">
                 <a:solidFill>
@@ -11361,9 +10941,6 @@
               </a:rPr>
               <a:t>你们几点上课？</a:t>
             </a:r>
-            <a:pPr algn="l" indent="0" marL="0">
-              <a:buNone/>
-            </a:pPr>
             <a:r>
               <a:rPr lang="en-US" sz="1300" dirty="0">
                 <a:solidFill>
@@ -11375,9 +10952,6 @@
               </a:rPr>
               <a:t> </a:t>
             </a:r>
-            <a:pPr algn="l" indent="0" marL="0">
-              <a:buNone/>
-            </a:pPr>
             <a:r>
               <a:rPr lang="en-US" sz="1300" dirty="0">
                 <a:solidFill>
@@ -11389,9 +10963,6 @@
               </a:rPr>
               <a:t>start class · </a:t>
             </a:r>
-            <a:pPr algn="l" indent="0" marL="0">
-              <a:buNone/>
-            </a:pPr>
             <a:r>
               <a:rPr lang="en-US" sz="1300" b="1" dirty="0">
                 <a:solidFill>
@@ -11420,9 +10991,6 @@
               </a:rPr>
               <a:t>5</a:t>
             </a:r>
-            <a:pPr algn="l" indent="0" marL="0">
-              <a:buNone/>
-            </a:pPr>
             <a:r>
               <a:rPr lang="en-US" sz="1300" dirty="0">
                 <a:solidFill>
@@ -11434,9 +11002,6 @@
               </a:rPr>
               <a:t> </a:t>
             </a:r>
-            <a:pPr algn="l" indent="0" marL="0">
-              <a:buNone/>
-            </a:pPr>
             <a:r>
               <a:rPr lang="en-US" sz="1500" b="1" dirty="0">
                 <a:solidFill>
@@ -11448,9 +11013,6 @@
               </a:rPr>
               <a:t>你几点吃午饭？</a:t>
             </a:r>
-            <a:pPr algn="l" indent="0" marL="0">
-              <a:buNone/>
-            </a:pPr>
             <a:r>
               <a:rPr lang="en-US" sz="1300" dirty="0">
                 <a:solidFill>
@@ -11462,9 +11024,6 @@
               </a:rPr>
               <a:t> </a:t>
             </a:r>
-            <a:pPr algn="l" indent="0" marL="0">
-              <a:buNone/>
-            </a:pPr>
             <a:r>
               <a:rPr lang="en-US" sz="1300" dirty="0">
                 <a:solidFill>
@@ -11476,9 +11035,6 @@
               </a:rPr>
               <a:t>lunch · </a:t>
             </a:r>
-            <a:pPr algn="l" indent="0" marL="0">
-              <a:buNone/>
-            </a:pPr>
             <a:r>
               <a:rPr lang="en-US" sz="1300" b="1" dirty="0">
                 <a:solidFill>
@@ -11507,9 +11063,6 @@
               </a:rPr>
               <a:t>6</a:t>
             </a:r>
-            <a:pPr algn="l" indent="0" marL="0">
-              <a:buNone/>
-            </a:pPr>
             <a:r>
               <a:rPr lang="en-US" sz="1300" dirty="0">
                 <a:solidFill>
@@ -11521,9 +11074,6 @@
               </a:rPr>
               <a:t> </a:t>
             </a:r>
-            <a:pPr algn="l" indent="0" marL="0">
-              <a:buNone/>
-            </a:pPr>
             <a:r>
               <a:rPr lang="en-US" sz="1500" b="1" dirty="0">
                 <a:solidFill>
@@ -11535,9 +11085,6 @@
               </a:rPr>
               <a:t>你们下午几点放学？</a:t>
             </a:r>
-            <a:pPr algn="l" indent="0" marL="0">
-              <a:buNone/>
-            </a:pPr>
             <a:r>
               <a:rPr lang="en-US" sz="1300" dirty="0">
                 <a:solidFill>
@@ -11549,9 +11096,6 @@
               </a:rPr>
               <a:t> </a:t>
             </a:r>
-            <a:pPr algn="l" indent="0" marL="0">
-              <a:buNone/>
-            </a:pPr>
             <a:r>
               <a:rPr lang="en-US" sz="1300" dirty="0">
                 <a:solidFill>
@@ -11563,9 +11107,6 @@
               </a:rPr>
               <a:t>finish school · </a:t>
             </a:r>
-            <a:pPr algn="l" indent="0" marL="0">
-              <a:buNone/>
-            </a:pPr>
             <a:r>
               <a:rPr lang="en-US" sz="1300" b="1" dirty="0">
                 <a:solidFill>
@@ -11594,9 +11135,6 @@
               </a:rPr>
               <a:t>7</a:t>
             </a:r>
-            <a:pPr algn="l" indent="0" marL="0">
-              <a:buNone/>
-            </a:pPr>
             <a:r>
               <a:rPr lang="en-US" sz="1300" dirty="0">
                 <a:solidFill>
@@ -11608,9 +11146,6 @@
               </a:rPr>
               <a:t> </a:t>
             </a:r>
-            <a:pPr algn="l" indent="0" marL="0">
-              <a:buNone/>
-            </a:pPr>
             <a:r>
               <a:rPr lang="en-US" sz="1500" b="1" dirty="0">
                 <a:solidFill>
@@ -11622,9 +11157,6 @@
               </a:rPr>
               <a:t>你几点吃晚饭？</a:t>
             </a:r>
-            <a:pPr algn="l" indent="0" marL="0">
-              <a:buNone/>
-            </a:pPr>
             <a:r>
               <a:rPr lang="en-US" sz="1300" dirty="0">
                 <a:solidFill>
@@ -11636,9 +11168,6 @@
               </a:rPr>
               <a:t> </a:t>
             </a:r>
-            <a:pPr algn="l" indent="0" marL="0">
-              <a:buNone/>
-            </a:pPr>
             <a:r>
               <a:rPr lang="en-US" sz="1300" dirty="0">
                 <a:solidFill>
@@ -11650,9 +11179,6 @@
               </a:rPr>
               <a:t>dinner · </a:t>
             </a:r>
-            <a:pPr algn="l" indent="0" marL="0">
-              <a:buNone/>
-            </a:pPr>
             <a:r>
               <a:rPr lang="en-US" sz="1300" b="1" dirty="0">
                 <a:solidFill>
@@ -11681,9 +11207,6 @@
               </a:rPr>
               <a:t>8</a:t>
             </a:r>
-            <a:pPr algn="l" indent="0" marL="0">
-              <a:buNone/>
-            </a:pPr>
             <a:r>
               <a:rPr lang="en-US" sz="1300" dirty="0">
                 <a:solidFill>
@@ -11695,9 +11218,6 @@
               </a:rPr>
               <a:t> </a:t>
             </a:r>
-            <a:pPr algn="l" indent="0" marL="0">
-              <a:buNone/>
-            </a:pPr>
             <a:r>
               <a:rPr lang="en-US" sz="1500" b="1" dirty="0">
                 <a:solidFill>
@@ -11709,9 +11229,6 @@
               </a:rPr>
               <a:t>你晚上几点睡觉？</a:t>
             </a:r>
-            <a:pPr algn="l" indent="0" marL="0">
-              <a:buNone/>
-            </a:pPr>
             <a:r>
               <a:rPr lang="en-US" sz="1300" dirty="0">
                 <a:solidFill>
@@ -11723,9 +11240,6 @@
               </a:rPr>
               <a:t> </a:t>
             </a:r>
-            <a:pPr algn="l" indent="0" marL="0">
-              <a:buNone/>
-            </a:pPr>
             <a:r>
               <a:rPr lang="en-US" sz="1300" dirty="0">
                 <a:solidFill>
@@ -11737,9 +11251,6 @@
               </a:rPr>
               <a:t>sleep · </a:t>
             </a:r>
-            <a:pPr algn="l" indent="0" marL="0">
-              <a:buNone/>
-            </a:pPr>
             <a:r>
               <a:rPr lang="en-US" sz="1300" b="1" dirty="0">
                 <a:solidFill>
@@ -12187,12 +11698,6 @@
               </a:rPr>
               <a:t>Teacher asks the volunteer all 8 questions and writes the answers on the board in </a:t>
             </a:r>
-            <a:pPr algn="l" indent="0" marL="0">
-              <a:spcAft>
-                <a:spcPts val="800"/>
-              </a:spcAft>
-              <a:buNone/>
-            </a:pPr>
             <a:r>
               <a:rPr lang="en-US" sz="1100" b="1" dirty="0">
                 <a:solidFill>
@@ -12204,12 +11709,6 @@
               </a:rPr>
               <a:t>note form</a:t>
             </a:r>
-            <a:pPr algn="l" indent="0" marL="0">
-              <a:spcAft>
-                <a:spcPts val="800"/>
-              </a:spcAft>
-              <a:buNone/>
-            </a:pPr>
             <a:r>
               <a:rPr lang="en-US" sz="1100" dirty="0">
                 <a:solidFill>
@@ -12595,12 +12094,6 @@
               </a:rPr>
               <a:t>The notes become </a:t>
             </a:r>
-            <a:pPr algn="l" indent="0" marL="0">
-              <a:spcAft>
-                <a:spcPts val="800"/>
-              </a:spcAft>
-              <a:buNone/>
-            </a:pPr>
             <a:r>
               <a:rPr lang="en-US" sz="1100" b="1" dirty="0">
                 <a:solidFill>
@@ -12612,12 +12105,6 @@
               </a:rPr>
               <a:t>one flowing report sentence</a:t>
             </a:r>
-            <a:pPr algn="l" indent="0" marL="0">
-              <a:spcAft>
-                <a:spcPts val="800"/>
-              </a:spcAft>
-              <a:buNone/>
-            </a:pPr>
             <a:r>
               <a:rPr lang="en-US" sz="1100" dirty="0">
                 <a:solidFill>
@@ -12671,12 +12158,6 @@
               </a:rPr>
               <a:t>他/她</a:t>
             </a:r>
-            <a:pPr algn="l" indent="0" marL="0">
-              <a:lnSpc>
-                <a:spcPts val="2400"/>
-              </a:lnSpc>
-              <a:buNone/>
-            </a:pPr>
             <a:r>
               <a:rPr lang="en-US" sz="1600" dirty="0">
                 <a:solidFill>
@@ -12688,12 +12169,6 @@
               </a:rPr>
               <a:t>早上</a:t>
             </a:r>
-            <a:pPr algn="l" indent="0" marL="0">
-              <a:lnSpc>
-                <a:spcPts val="2400"/>
-              </a:lnSpc>
-              <a:buNone/>
-            </a:pPr>
             <a:r>
               <a:rPr lang="en-US" sz="1600" b="1" dirty="0">
                 <a:solidFill>
@@ -12705,12 +12180,6 @@
               </a:rPr>
               <a:t>七点</a:t>
             </a:r>
-            <a:pPr algn="l" indent="0" marL="0">
-              <a:lnSpc>
-                <a:spcPts val="2400"/>
-              </a:lnSpc>
-              <a:buNone/>
-            </a:pPr>
             <a:r>
               <a:rPr lang="en-US" sz="1600" dirty="0">
                 <a:solidFill>
@@ -12722,12 +12191,6 @@
               </a:rPr>
               <a:t>起床，</a:t>
             </a:r>
-            <a:pPr algn="l" indent="0" marL="0">
-              <a:lnSpc>
-                <a:spcPts val="2400"/>
-              </a:lnSpc>
-              <a:buNone/>
-            </a:pPr>
             <a:r>
               <a:rPr lang="en-US" sz="1600" b="1" dirty="0">
                 <a:solidFill>
@@ -12739,12 +12202,6 @@
               </a:rPr>
               <a:t>七点半</a:t>
             </a:r>
-            <a:pPr algn="l" indent="0" marL="0">
-              <a:lnSpc>
-                <a:spcPts val="2400"/>
-              </a:lnSpc>
-              <a:buNone/>
-            </a:pPr>
             <a:r>
               <a:rPr lang="en-US" sz="1600" dirty="0">
                 <a:solidFill>
@@ -12870,9 +12327,6 @@
               </a:rPr>
               <a:t>Person switch: the interview uses </a:t>
             </a:r>
-            <a:pPr algn="l" indent="0" marL="0">
-              <a:buNone/>
-            </a:pPr>
             <a:r>
               <a:rPr lang="en-US" sz="1100" b="1" dirty="0">
                 <a:solidFill>
@@ -12884,9 +12338,6 @@
               </a:rPr>
               <a:t>你</a:t>
             </a:r>
-            <a:pPr algn="l" indent="0" marL="0">
-              <a:buNone/>
-            </a:pPr>
             <a:r>
               <a:rPr lang="en-US" sz="1100" dirty="0">
                 <a:solidFill>
@@ -12898,9 +12349,6 @@
               </a:rPr>
               <a:t> (you) — the written report uses </a:t>
             </a:r>
-            <a:pPr algn="l" indent="0" marL="0">
-              <a:buNone/>
-            </a:pPr>
             <a:r>
               <a:rPr lang="en-US" sz="1100" b="1" dirty="0">
                 <a:solidFill>
@@ -12912,9 +12360,6 @@
               </a:rPr>
               <a:t>他</a:t>
             </a:r>
-            <a:pPr algn="l" indent="0" marL="0">
-              <a:buNone/>
-            </a:pPr>
             <a:r>
               <a:rPr lang="en-US" sz="1100" dirty="0">
                 <a:solidFill>
@@ -12926,9 +12371,6 @@
               </a:rPr>
               <a:t> (he) or </a:t>
             </a:r>
-            <a:pPr algn="l" indent="0" marL="0">
-              <a:buNone/>
-            </a:pPr>
             <a:r>
               <a:rPr lang="en-US" sz="1100" b="1" dirty="0">
                 <a:solidFill>
@@ -12940,9 +12382,6 @@
               </a:rPr>
               <a:t>她</a:t>
             </a:r>
-            <a:pPr algn="l" indent="0" marL="0">
-              <a:buNone/>
-            </a:pPr>
             <a:r>
               <a:rPr lang="en-US" sz="1100" dirty="0">
                 <a:solidFill>
@@ -13432,12 +12871,6 @@
               </a:rPr>
               <a:t>Think about the 8 interview questions — which one covers </a:t>
             </a:r>
-            <a:pPr algn="l" indent="0" marL="0">
-              <a:spcBef>
-                <a:spcPts val="300"/>
-              </a:spcBef>
-              <a:buNone/>
-            </a:pPr>
             <a:r>
               <a:rPr lang="en-US" sz="1100" b="1" dirty="0">
                 <a:solidFill>
@@ -13449,12 +12882,6 @@
               </a:rPr>
               <a:t>午饭</a:t>
             </a:r>
-            <a:pPr algn="l" indent="0" marL="0">
-              <a:spcBef>
-                <a:spcPts val="300"/>
-              </a:spcBef>
-              <a:buNone/>
-            </a:pPr>
             <a:r>
               <a:rPr lang="en-US" sz="1100" dirty="0">
                 <a:solidFill>
@@ -13664,12 +13091,6 @@
               </a:rPr>
               <a:t>Question 6: </a:t>
             </a:r>
-            <a:pPr algn="l" indent="0" marL="0">
-              <a:spcBef>
-                <a:spcPts val="300"/>
-              </a:spcBef>
-              <a:buNone/>
-            </a:pPr>
             <a:r>
               <a:rPr lang="en-US" sz="1100" b="1" dirty="0">
                 <a:solidFill>
@@ -13681,12 +13102,6 @@
               </a:rPr>
               <a:t>你们下午几点放学？</a:t>
             </a:r>
-            <a:pPr algn="l" indent="0" marL="0">
-              <a:spcBef>
-                <a:spcPts val="300"/>
-              </a:spcBef>
-              <a:buNone/>
-            </a:pPr>
             <a:r>
               <a:rPr lang="en-US" sz="1100" dirty="0">
                 <a:solidFill>
@@ -14450,77 +13865,81 @@
               </a:rPr>
               <a:t>你们下午几点放学？</a:t>
             </a:r>
-            <a:pPr algn="l" indent="0" marL="0">
-              <a:lnSpc>
-                <a:spcPts val="2550"/>
-              </a:lnSpc>
+            <a:r>
+              <a:rPr lang="en-US" sz="1700" dirty="0">
+                <a:solidFill>
+                  <a:srgbClr val="1E2A38"/>
+                </a:solidFill>
+                <a:latin typeface="Noto Serif SC" pitchFamily="34" charset="0"/>
+                <a:ea typeface="Noto Serif SC" pitchFamily="34" charset="-122"/>
+                <a:cs typeface="Noto Serif SC" pitchFamily="34" charset="-120"/>
+              </a:rPr>
+              <a:t> → 他们/她 下午几点放学 → </a:t>
+            </a:r>
+            <a:r>
+              <a:rPr lang="en-US" sz="1700" b="1" dirty="0">
+                <a:solidFill>
+                  <a:srgbClr val="C8943E"/>
+                </a:solidFill>
+                <a:latin typeface="Noto Serif SC" pitchFamily="34" charset="0"/>
+                <a:ea typeface="Noto Serif SC" pitchFamily="34" charset="-122"/>
+                <a:cs typeface="Noto Serif SC" pitchFamily="34" charset="-120"/>
+              </a:rPr>
+              <a:t>他们下午三点半放学。</a:t>
+            </a:r>
+            <a:endParaRPr lang="en-US" sz="1700" dirty="0"/>
+          </a:p>
+        </p:txBody>
+      </p:sp>
+      <p:sp>
+        <p:nvSpPr>
+          <p:cNvPr id="13" name="Text 11"/>
+          <p:cNvSpPr/>
+          <p:nvPr/>
+        </p:nvSpPr>
+        <p:spPr>
+          <a:xfrm>
+            <a:off x="1190476" y="2650480"/>
+            <a:ext cx="10528566" cy="180975"/>
+          </a:xfrm>
+          <a:prstGeom prst="rect">
+            <a:avLst/>
+          </a:prstGeom>
+          <a:noFill/>
+          <a:ln/>
+        </p:spPr>
+        <p:txBody>
+          <a:bodyPr wrap="square" lIns="0" tIns="0" rIns="0" bIns="0" rtlCol="0" anchor="t"/>
+          <a:lstStyle/>
+          <a:p>
+            <a:pPr algn="l" indent="0" marL="0">
               <a:spcBef>
                 <a:spcPts val="800"/>
               </a:spcBef>
               <a:buNone/>
             </a:pPr>
             <a:r>
-              <a:rPr lang="en-US" sz="1700" dirty="0">
-                <a:solidFill>
-                  <a:srgbClr val="1E2A38"/>
-                </a:solidFill>
-                <a:latin typeface="Noto Serif SC" pitchFamily="34" charset="0"/>
-                <a:ea typeface="Noto Serif SC" pitchFamily="34" charset="-122"/>
-                <a:cs typeface="Noto Serif SC" pitchFamily="34" charset="-120"/>
-              </a:rPr>
-              <a:t> → 他们/她 下午几点放学 → </a:t>
-            </a:r>
-            <a:pPr algn="l" indent="0" marL="0">
-              <a:lnSpc>
-                <a:spcPts val="2550"/>
-              </a:lnSpc>
-              <a:spcBef>
-                <a:spcPts val="800"/>
-              </a:spcBef>
-              <a:buNone/>
-            </a:pPr>
-            <a:r>
-              <a:rPr lang="en-US" sz="1700" b="1" dirty="0">
+              <a:rPr lang="en-US" sz="1000" dirty="0">
+                <a:solidFill>
+                  <a:srgbClr val="5B6677"/>
+                </a:solidFill>
+                <a:latin typeface="Noto Sans SC" pitchFamily="34" charset="0"/>
+                <a:ea typeface="Noto Sans SC" pitchFamily="34" charset="-122"/>
+                <a:cs typeface="Noto Sans SC" pitchFamily="34" charset="-120"/>
+              </a:rPr>
+              <a:t>你们 (asking a group) becomes </a:t>
+            </a:r>
+            <a:r>
+              <a:rPr lang="en-US" sz="1000" b="1" dirty="0">
                 <a:solidFill>
                   <a:srgbClr val="C8943E"/>
                 </a:solidFill>
-                <a:latin typeface="Noto Serif SC" pitchFamily="34" charset="0"/>
-                <a:ea typeface="Noto Serif SC" pitchFamily="34" charset="-122"/>
-                <a:cs typeface="Noto Serif SC" pitchFamily="34" charset="-120"/>
-              </a:rPr>
-              <a:t>他们下午三点半放学。</a:t>
-            </a:r>
-            <a:endParaRPr lang="en-US" sz="1700" dirty="0"/>
-          </a:p>
-        </p:txBody>
-      </p:sp>
-      <p:sp>
-        <p:nvSpPr>
-          <p:cNvPr id="13" name="Text 11"/>
-          <p:cNvSpPr/>
-          <p:nvPr/>
-        </p:nvSpPr>
-        <p:spPr>
-          <a:xfrm>
-            <a:off x="1190476" y="2650480"/>
-            <a:ext cx="10528566" cy="180975"/>
-          </a:xfrm>
-          <a:prstGeom prst="rect">
-            <a:avLst/>
-          </a:prstGeom>
-          <a:noFill/>
-          <a:ln/>
-        </p:spPr>
-        <p:txBody>
-          <a:bodyPr wrap="square" lIns="0" tIns="0" rIns="0" bIns="0" rtlCol="0" anchor="t"/>
-          <a:lstStyle/>
-          <a:p>
-            <a:pPr algn="l" indent="0" marL="0">
-              <a:spcBef>
-                <a:spcPts val="800"/>
-              </a:spcBef>
-              <a:buNone/>
-            </a:pPr>
+                <a:latin typeface="Noto Sans SC" pitchFamily="34" charset="0"/>
+                <a:ea typeface="Noto Sans SC" pitchFamily="34" charset="-122"/>
+                <a:cs typeface="Noto Sans SC" pitchFamily="34" charset="-120"/>
+              </a:rPr>
+              <a:t>他们</a:t>
+            </a:r>
             <a:r>
               <a:rPr lang="en-US" sz="1000" dirty="0">
                 <a:solidFill>
@@ -14530,14 +13949,8 @@
                 <a:ea typeface="Noto Sans SC" pitchFamily="34" charset="-122"/>
                 <a:cs typeface="Noto Sans SC" pitchFamily="34" charset="-120"/>
               </a:rPr>
-              <a:t>你们 (asking a group) becomes </a:t>
-            </a:r>
-            <a:pPr algn="l" indent="0" marL="0">
-              <a:spcBef>
-                <a:spcPts val="800"/>
-              </a:spcBef>
-              <a:buNone/>
-            </a:pPr>
+              <a:t> (they) or </a:t>
+            </a:r>
             <a:r>
               <a:rPr lang="en-US" sz="1000" b="1" dirty="0">
                 <a:solidFill>
@@ -14547,48 +13960,8 @@
                 <a:ea typeface="Noto Sans SC" pitchFamily="34" charset="-122"/>
                 <a:cs typeface="Noto Sans SC" pitchFamily="34" charset="-120"/>
               </a:rPr>
-              <a:t>他们</a:t>
-            </a:r>
-            <a:pPr algn="l" indent="0" marL="0">
-              <a:spcBef>
-                <a:spcPts val="800"/>
-              </a:spcBef>
-              <a:buNone/>
-            </a:pPr>
-            <a:r>
-              <a:rPr lang="en-US" sz="1000" dirty="0">
-                <a:solidFill>
-                  <a:srgbClr val="5B6677"/>
-                </a:solidFill>
-                <a:latin typeface="Noto Sans SC" pitchFamily="34" charset="0"/>
-                <a:ea typeface="Noto Sans SC" pitchFamily="34" charset="-122"/>
-                <a:cs typeface="Noto Sans SC" pitchFamily="34" charset="-120"/>
-              </a:rPr>
-              <a:t> (they) or </a:t>
-            </a:r>
-            <a:pPr algn="l" indent="0" marL="0">
-              <a:spcBef>
-                <a:spcPts val="800"/>
-              </a:spcBef>
-              <a:buNone/>
-            </a:pPr>
-            <a:r>
-              <a:rPr lang="en-US" sz="1000" b="1" dirty="0">
-                <a:solidFill>
-                  <a:srgbClr val="C8943E"/>
-                </a:solidFill>
-                <a:latin typeface="Noto Sans SC" pitchFamily="34" charset="0"/>
-                <a:ea typeface="Noto Sans SC" pitchFamily="34" charset="-122"/>
-                <a:cs typeface="Noto Sans SC" pitchFamily="34" charset="-120"/>
-              </a:rPr>
               <a:t>她</a:t>
             </a:r>
-            <a:pPr algn="l" indent="0" marL="0">
-              <a:spcBef>
-                <a:spcPts val="800"/>
-              </a:spcBef>
-              <a:buNone/>
-            </a:pPr>
             <a:r>
               <a:rPr lang="en-US" sz="1000" dirty="0">
                 <a:solidFill>
@@ -15668,9 +15041,6 @@
               </a:rPr>
               <a:t>1.</a:t>
             </a:r>
-            <a:pPr algn="l" indent="0" marL="0">
-              <a:buNone/>
-            </a:pPr>
             <a:r>
               <a:rPr lang="en-US" sz="1100" dirty="0">
                 <a:solidFill>
@@ -15682,9 +15052,6 @@
               </a:rPr>
               <a:t> </a:t>
             </a:r>
-            <a:pPr algn="l" indent="0" marL="0">
-              <a:buNone/>
-            </a:pPr>
             <a:r>
               <a:rPr lang="en-US" sz="1100" b="1" dirty="0">
                 <a:solidFill>
@@ -15696,9 +15063,6 @@
               </a:rPr>
               <a:t>A</a:t>
             </a:r>
-            <a:pPr algn="l" indent="0" marL="0">
-              <a:buNone/>
-            </a:pPr>
             <a:r>
               <a:rPr lang="en-US" sz="1100" dirty="0">
                 <a:solidFill>
@@ -15710,9 +15074,6 @@
               </a:rPr>
               <a:t> asks all 8 questions — </a:t>
             </a:r>
-            <a:pPr algn="l" indent="0" marL="0">
-              <a:buNone/>
-            </a:pPr>
             <a:r>
               <a:rPr lang="en-US" sz="1100" b="1" dirty="0">
                 <a:solidFill>
@@ -15724,9 +15085,6 @@
               </a:rPr>
               <a:t>B</a:t>
             </a:r>
-            <a:pPr algn="l" indent="0" marL="0">
-              <a:buNone/>
-            </a:pPr>
             <a:r>
               <a:rPr lang="en-US" sz="1100" dirty="0">
                 <a:solidFill>
@@ -15777,9 +15135,6 @@
               </a:rPr>
               <a:t>2.</a:t>
             </a:r>
-            <a:pPr algn="l" indent="0" marL="0">
-              <a:buNone/>
-            </a:pPr>
             <a:r>
               <a:rPr lang="en-US" sz="1100" dirty="0">
                 <a:solidFill>
@@ -15791,9 +15146,6 @@
               </a:rPr>
               <a:t> </a:t>
             </a:r>
-            <a:pPr algn="l" indent="0" marL="0">
-              <a:buNone/>
-            </a:pPr>
             <a:r>
               <a:rPr lang="en-US" sz="1100" b="1" dirty="0">
                 <a:solidFill>
@@ -15805,9 +15157,6 @@
               </a:rPr>
               <a:t>Swap</a:t>
             </a:r>
-            <a:pPr algn="l" indent="0" marL="0">
-              <a:buNone/>
-            </a:pPr>
             <a:r>
               <a:rPr lang="en-US" sz="1100" dirty="0">
                 <a:solidFill>
@@ -15978,6 +15327,92 @@
               </a:rPr>
               <a:t>Question sheet with </a:t>
             </a:r>
+            <a:r>
+              <a:rPr lang="en-US" sz="1000" b="1" dirty="0">
+                <a:solidFill>
+                  <a:srgbClr val="5B6677"/>
+                </a:solidFill>
+                <a:latin typeface="Noto Sans SC" pitchFamily="34" charset="0"/>
+                <a:ea typeface="Noto Sans SC" pitchFamily="34" charset="-122"/>
+                <a:cs typeface="Noto Sans SC" pitchFamily="34" charset="-120"/>
+              </a:rPr>
+              <a:t>pinyin</a:t>
+            </a:r>
+            <a:r>
+              <a:rPr lang="en-US" sz="1000" dirty="0">
+                <a:solidFill>
+                  <a:srgbClr val="5B6677"/>
+                </a:solidFill>
+                <a:latin typeface="Noto Sans SC" pitchFamily="34" charset="0"/>
+                <a:ea typeface="Noto Sans SC" pitchFamily="34" charset="-122"/>
+                <a:cs typeface="Noto Sans SC" pitchFamily="34" charset="-120"/>
+              </a:rPr>
+              <a:t> available throughout. Note-form answers only, not full sentences, during the interview itself.</a:t>
+            </a:r>
+            <a:endParaRPr lang="en-US" sz="1000" dirty="0"/>
+          </a:p>
+        </p:txBody>
+      </p:sp>
+      <p:sp>
+        <p:nvSpPr>
+          <p:cNvPr id="33" name="Text 31"/>
+          <p:cNvSpPr/>
+          <p:nvPr/>
+        </p:nvSpPr>
+        <p:spPr>
+          <a:xfrm>
+            <a:off x="4349651" y="2986683"/>
+            <a:ext cx="3562552" cy="161925"/>
+          </a:xfrm>
+          <a:prstGeom prst="rect">
+            <a:avLst/>
+          </a:prstGeom>
+          <a:noFill/>
+          <a:ln/>
+        </p:spPr>
+        <p:txBody>
+          <a:bodyPr wrap="square" lIns="0" tIns="0" rIns="0" bIns="0" rtlCol="0" anchor="t"/>
+          <a:lstStyle/>
+          <a:p>
+            <a:pPr algn="l" indent="0" marL="0">
+              <a:buNone/>
+            </a:pPr>
+            <a:r>
+              <a:rPr lang="en-US" sz="900" b="1" dirty="0">
+                <a:solidFill>
+                  <a:srgbClr val="3A7D8C"/>
+                </a:solidFill>
+                <a:latin typeface="Noto Sans SC" pitchFamily="34" charset="0"/>
+                <a:ea typeface="Noto Sans SC" pitchFamily="34" charset="-122"/>
+                <a:cs typeface="Noto Sans SC" pitchFamily="34" charset="-120"/>
+              </a:rPr>
+              <a:t>EXTENSION</a:t>
+            </a:r>
+            <a:endParaRPr lang="en-US" sz="900" dirty="0"/>
+          </a:p>
+        </p:txBody>
+      </p:sp>
+      <p:sp>
+        <p:nvSpPr>
+          <p:cNvPr id="34" name="Text 32"/>
+          <p:cNvSpPr/>
+          <p:nvPr/>
+        </p:nvSpPr>
+        <p:spPr>
+          <a:xfrm>
+            <a:off x="4349651" y="3186708"/>
+            <a:ext cx="3562552" cy="542925"/>
+          </a:xfrm>
+          <a:prstGeom prst="rect">
+            <a:avLst/>
+          </a:prstGeom>
+          <a:noFill/>
+          <a:ln/>
+        </p:spPr>
+        <p:txBody>
+          <a:bodyPr wrap="square" lIns="0" tIns="0" rIns="0" bIns="0" rtlCol="0" anchor="t"/>
+          <a:lstStyle/>
+          <a:p>
             <a:pPr algn="l" indent="0" marL="0">
               <a:spcBef>
                 <a:spcPts val="300"/>
@@ -15985,6 +15420,17 @@
               <a:buNone/>
             </a:pPr>
             <a:r>
+              <a:rPr lang="en-US" sz="1000" dirty="0">
+                <a:solidFill>
+                  <a:srgbClr val="5B6677"/>
+                </a:solidFill>
+                <a:latin typeface="Noto Sans SC" pitchFamily="34" charset="0"/>
+                <a:ea typeface="Noto Sans SC" pitchFamily="34" charset="-122"/>
+                <a:cs typeface="Noto Sans SC" pitchFamily="34" charset="-120"/>
+              </a:rPr>
+              <a:t>After the standard 8 questions, fluent pairs add one follow-up question of their own, e.g. </a:t>
+            </a:r>
+            <a:r>
               <a:rPr lang="en-US" sz="1000" b="1" dirty="0">
                 <a:solidFill>
                   <a:srgbClr val="5B6677"/>
@@ -15993,8 +15439,83 @@
                 <a:ea typeface="Noto Sans SC" pitchFamily="34" charset="-122"/>
                 <a:cs typeface="Noto Sans SC" pitchFamily="34" charset="-120"/>
               </a:rPr>
-              <a:t>pinyin</a:t>
-            </a:r>
+              <a:t>你几点吃晚饭以后做作业？</a:t>
+            </a:r>
+            <a:r>
+              <a:rPr lang="en-US" sz="1000" dirty="0">
+                <a:solidFill>
+                  <a:srgbClr val="5B6677"/>
+                </a:solidFill>
+                <a:latin typeface="Noto Sans SC" pitchFamily="34" charset="0"/>
+                <a:ea typeface="Noto Sans SC" pitchFamily="34" charset="-122"/>
+                <a:cs typeface="Noto Sans SC" pitchFamily="34" charset="-120"/>
+              </a:rPr>
+              <a:t> (English scaffolding accepted if needed).</a:t>
+            </a:r>
+            <a:endParaRPr lang="en-US" sz="1000" dirty="0"/>
+          </a:p>
+        </p:txBody>
+      </p:sp>
+      <p:sp>
+        <p:nvSpPr>
+          <p:cNvPr id="35" name="Text 33"/>
+          <p:cNvSpPr/>
+          <p:nvPr/>
+        </p:nvSpPr>
+        <p:spPr>
+          <a:xfrm>
+            <a:off x="8045500" y="2986683"/>
+            <a:ext cx="3562401" cy="161925"/>
+          </a:xfrm>
+          <a:prstGeom prst="rect">
+            <a:avLst/>
+          </a:prstGeom>
+          <a:noFill/>
+          <a:ln/>
+        </p:spPr>
+        <p:txBody>
+          <a:bodyPr wrap="square" lIns="0" tIns="0" rIns="0" bIns="0" rtlCol="0" anchor="t"/>
+          <a:lstStyle/>
+          <a:p>
+            <a:pPr algn="l" indent="0" marL="0">
+              <a:buNone/>
+            </a:pPr>
+            <a:r>
+              <a:rPr lang="en-US" sz="900" b="1" dirty="0">
+                <a:solidFill>
+                  <a:srgbClr val="3A7D8C"/>
+                </a:solidFill>
+                <a:latin typeface="Noto Sans SC" pitchFamily="34" charset="0"/>
+                <a:ea typeface="Noto Sans SC" pitchFamily="34" charset="-122"/>
+                <a:cs typeface="Noto Sans SC" pitchFamily="34" charset="-120"/>
+              </a:rPr>
+              <a:t>OTR</a:t>
+            </a:r>
+            <a:endParaRPr lang="en-US" sz="900" dirty="0"/>
+          </a:p>
+        </p:txBody>
+      </p:sp>
+      <p:sp>
+        <p:nvSpPr>
+          <p:cNvPr id="36" name="Text 34"/>
+          <p:cNvSpPr/>
+          <p:nvPr/>
+        </p:nvSpPr>
+        <p:spPr>
+          <a:xfrm>
+            <a:off x="8045500" y="3186708"/>
+            <a:ext cx="3562401" cy="361950"/>
+          </a:xfrm>
+          <a:prstGeom prst="rect">
+            <a:avLst/>
+          </a:prstGeom>
+          <a:noFill/>
+          <a:ln/>
+        </p:spPr>
+        <p:txBody>
+          <a:bodyPr wrap="square" lIns="0" tIns="0" rIns="0" bIns="0" rtlCol="0" anchor="t"/>
+          <a:lstStyle/>
+          <a:p>
             <a:pPr algn="l" indent="0" marL="0">
               <a:spcBef>
                 <a:spcPts val="300"/>
@@ -16010,80 +15531,10 @@
                 <a:ea typeface="Noto Sans SC" pitchFamily="34" charset="-122"/>
                 <a:cs typeface="Noto Sans SC" pitchFamily="34" charset="-120"/>
               </a:rPr>
-              <a:t> available throughout. Note-form answers only, not full sentences, during the interview itself.</a:t>
-            </a:r>
-            <a:endParaRPr lang="en-US" sz="1000" dirty="0"/>
-          </a:p>
-        </p:txBody>
-      </p:sp>
-      <p:sp>
-        <p:nvSpPr>
-          <p:cNvPr id="33" name="Text 31"/>
-          <p:cNvSpPr/>
-          <p:nvPr/>
-        </p:nvSpPr>
-        <p:spPr>
-          <a:xfrm>
-            <a:off x="4349651" y="2986683"/>
-            <a:ext cx="3562552" cy="161925"/>
-          </a:xfrm>
-          <a:prstGeom prst="rect">
-            <a:avLst/>
-          </a:prstGeom>
-          <a:noFill/>
-          <a:ln/>
-        </p:spPr>
-        <p:txBody>
-          <a:bodyPr wrap="square" lIns="0" tIns="0" rIns="0" bIns="0" rtlCol="0" anchor="t"/>
-          <a:lstStyle/>
-          <a:p>
-            <a:pPr algn="l" indent="0" marL="0">
-              <a:buNone/>
-            </a:pPr>
-            <a:r>
-              <a:rPr lang="en-US" sz="900" b="1" dirty="0">
-                <a:solidFill>
-                  <a:srgbClr val="3A7D8C"/>
-                </a:solidFill>
-                <a:latin typeface="Noto Sans SC" pitchFamily="34" charset="0"/>
-                <a:ea typeface="Noto Sans SC" pitchFamily="34" charset="-122"/>
-                <a:cs typeface="Noto Sans SC" pitchFamily="34" charset="-120"/>
-              </a:rPr>
-              <a:t>EXTENSION</a:t>
-            </a:r>
-            <a:endParaRPr lang="en-US" sz="900" dirty="0"/>
-          </a:p>
-        </p:txBody>
-      </p:sp>
-      <p:sp>
-        <p:nvSpPr>
-          <p:cNvPr id="34" name="Text 32"/>
-          <p:cNvSpPr/>
-          <p:nvPr/>
-        </p:nvSpPr>
-        <p:spPr>
-          <a:xfrm>
-            <a:off x="4349651" y="3186708"/>
-            <a:ext cx="3562552" cy="542925"/>
-          </a:xfrm>
-          <a:prstGeom prst="rect">
-            <a:avLst/>
-          </a:prstGeom>
-          <a:noFill/>
-          <a:ln/>
-        </p:spPr>
-        <p:txBody>
-          <a:bodyPr wrap="square" lIns="0" tIns="0" rIns="0" bIns="0" rtlCol="0" anchor="t"/>
-          <a:lstStyle/>
-          <a:p>
-            <a:pPr algn="l" indent="0" marL="0">
-              <a:spcBef>
-                <a:spcPts val="300"/>
-              </a:spcBef>
-              <a:buNone/>
-            </a:pPr>
-            <a:r>
-              <a:rPr lang="en-US" sz="1000" dirty="0">
+              <a:t>Every student must both </a:t>
+            </a:r>
+            <a:r>
+              <a:rPr lang="en-US" sz="1000" b="1" dirty="0">
                 <a:solidFill>
                   <a:srgbClr val="5B6677"/>
                 </a:solidFill>
@@ -16091,146 +15542,8 @@
                 <a:ea typeface="Noto Sans SC" pitchFamily="34" charset="-122"/>
                 <a:cs typeface="Noto Sans SC" pitchFamily="34" charset="-120"/>
               </a:rPr>
-              <a:t>After the standard 8 questions, fluent pairs add one follow-up question of their own, e.g. </a:t>
-            </a:r>
-            <a:pPr algn="l" indent="0" marL="0">
-              <a:spcBef>
-                <a:spcPts val="300"/>
-              </a:spcBef>
-              <a:buNone/>
-            </a:pPr>
-            <a:r>
-              <a:rPr lang="en-US" sz="1000" b="1" dirty="0">
-                <a:solidFill>
-                  <a:srgbClr val="5B6677"/>
-                </a:solidFill>
-                <a:latin typeface="Noto Sans SC" pitchFamily="34" charset="0"/>
-                <a:ea typeface="Noto Sans SC" pitchFamily="34" charset="-122"/>
-                <a:cs typeface="Noto Sans SC" pitchFamily="34" charset="-120"/>
-              </a:rPr>
-              <a:t>你几点吃晚饭以后做作业？</a:t>
-            </a:r>
-            <a:pPr algn="l" indent="0" marL="0">
-              <a:spcBef>
-                <a:spcPts val="300"/>
-              </a:spcBef>
-              <a:buNone/>
-            </a:pPr>
-            <a:r>
-              <a:rPr lang="en-US" sz="1000" dirty="0">
-                <a:solidFill>
-                  <a:srgbClr val="5B6677"/>
-                </a:solidFill>
-                <a:latin typeface="Noto Sans SC" pitchFamily="34" charset="0"/>
-                <a:ea typeface="Noto Sans SC" pitchFamily="34" charset="-122"/>
-                <a:cs typeface="Noto Sans SC" pitchFamily="34" charset="-120"/>
-              </a:rPr>
-              <a:t> (English scaffolding accepted if needed).</a:t>
-            </a:r>
-            <a:endParaRPr lang="en-US" sz="1000" dirty="0"/>
-          </a:p>
-        </p:txBody>
-      </p:sp>
-      <p:sp>
-        <p:nvSpPr>
-          <p:cNvPr id="35" name="Text 33"/>
-          <p:cNvSpPr/>
-          <p:nvPr/>
-        </p:nvSpPr>
-        <p:spPr>
-          <a:xfrm>
-            <a:off x="8045500" y="2986683"/>
-            <a:ext cx="3562401" cy="161925"/>
-          </a:xfrm>
-          <a:prstGeom prst="rect">
-            <a:avLst/>
-          </a:prstGeom>
-          <a:noFill/>
-          <a:ln/>
-        </p:spPr>
-        <p:txBody>
-          <a:bodyPr wrap="square" lIns="0" tIns="0" rIns="0" bIns="0" rtlCol="0" anchor="t"/>
-          <a:lstStyle/>
-          <a:p>
-            <a:pPr algn="l" indent="0" marL="0">
-              <a:buNone/>
-            </a:pPr>
-            <a:r>
-              <a:rPr lang="en-US" sz="900" b="1" dirty="0">
-                <a:solidFill>
-                  <a:srgbClr val="3A7D8C"/>
-                </a:solidFill>
-                <a:latin typeface="Noto Sans SC" pitchFamily="34" charset="0"/>
-                <a:ea typeface="Noto Sans SC" pitchFamily="34" charset="-122"/>
-                <a:cs typeface="Noto Sans SC" pitchFamily="34" charset="-120"/>
-              </a:rPr>
-              <a:t>OTR</a:t>
-            </a:r>
-            <a:endParaRPr lang="en-US" sz="900" dirty="0"/>
-          </a:p>
-        </p:txBody>
-      </p:sp>
-      <p:sp>
-        <p:nvSpPr>
-          <p:cNvPr id="36" name="Text 34"/>
-          <p:cNvSpPr/>
-          <p:nvPr/>
-        </p:nvSpPr>
-        <p:spPr>
-          <a:xfrm>
-            <a:off x="8045500" y="3186708"/>
-            <a:ext cx="3562401" cy="361950"/>
-          </a:xfrm>
-          <a:prstGeom prst="rect">
-            <a:avLst/>
-          </a:prstGeom>
-          <a:noFill/>
-          <a:ln/>
-        </p:spPr>
-        <p:txBody>
-          <a:bodyPr wrap="square" lIns="0" tIns="0" rIns="0" bIns="0" rtlCol="0" anchor="t"/>
-          <a:lstStyle/>
-          <a:p>
-            <a:pPr algn="l" indent="0" marL="0">
-              <a:spcBef>
-                <a:spcPts val="300"/>
-              </a:spcBef>
-              <a:buNone/>
-            </a:pPr>
-            <a:r>
-              <a:rPr lang="en-US" sz="1000" dirty="0">
-                <a:solidFill>
-                  <a:srgbClr val="5B6677"/>
-                </a:solidFill>
-                <a:latin typeface="Noto Sans SC" pitchFamily="34" charset="0"/>
-                <a:ea typeface="Noto Sans SC" pitchFamily="34" charset="-122"/>
-                <a:cs typeface="Noto Sans SC" pitchFamily="34" charset="-120"/>
-              </a:rPr>
-              <a:t>Every student must both </a:t>
-            </a:r>
-            <a:pPr algn="l" indent="0" marL="0">
-              <a:spcBef>
-                <a:spcPts val="300"/>
-              </a:spcBef>
-              <a:buNone/>
-            </a:pPr>
-            <a:r>
-              <a:rPr lang="en-US" sz="1000" b="1" dirty="0">
-                <a:solidFill>
-                  <a:srgbClr val="5B6677"/>
-                </a:solidFill>
-                <a:latin typeface="Noto Sans SC" pitchFamily="34" charset="0"/>
-                <a:ea typeface="Noto Sans SC" pitchFamily="34" charset="-122"/>
-                <a:cs typeface="Noto Sans SC" pitchFamily="34" charset="-120"/>
-              </a:rPr>
               <a:t>ask and answer</a:t>
             </a:r>
-            <a:pPr algn="l" indent="0" marL="0">
-              <a:spcBef>
-                <a:spcPts val="300"/>
-              </a:spcBef>
-              <a:buNone/>
-            </a:pPr>
             <a:r>
               <a:rPr lang="en-US" sz="1000" dirty="0">
                 <a:solidFill>
